--- a/Python_Study/02.파이썬활용-중급.pptx
+++ b/Python_Study/02.파이썬활용-중급.pptx
@@ -10,14 +10,15 @@
     <p:sldId id="269" r:id="rId4"/>
     <p:sldId id="270" r:id="rId5"/>
     <p:sldId id="271" r:id="rId6"/>
-    <p:sldId id="264" r:id="rId7"/>
-    <p:sldId id="260" r:id="rId8"/>
-    <p:sldId id="265" r:id="rId9"/>
-    <p:sldId id="262" r:id="rId10"/>
-    <p:sldId id="263" r:id="rId11"/>
-    <p:sldId id="266" r:id="rId12"/>
-    <p:sldId id="267" r:id="rId13"/>
-    <p:sldId id="268" r:id="rId14"/>
+    <p:sldId id="272" r:id="rId7"/>
+    <p:sldId id="264" r:id="rId8"/>
+    <p:sldId id="260" r:id="rId9"/>
+    <p:sldId id="265" r:id="rId10"/>
+    <p:sldId id="262" r:id="rId11"/>
+    <p:sldId id="263" r:id="rId12"/>
+    <p:sldId id="266" r:id="rId13"/>
+    <p:sldId id="267" r:id="rId14"/>
+    <p:sldId id="268" r:id="rId15"/>
   </p:sldIdLst>
   <p:sldSz cx="12192000" cy="6858000"/>
   <p:notesSz cx="6858000" cy="9144000"/>
@@ -3782,6 +3783,1318 @@
           <a:chExt cx="0" cy="0"/>
         </a:xfrm>
       </p:grpSpPr>
+      <p:pic>
+        <p:nvPicPr>
+          <p:cNvPr id="6146" name="Picture 2" descr="Teamwork, Cooperation, Brainstorming, Business, Finance">
+            <a:extLst>
+              <a:ext uri="{FF2B5EF4-FFF2-40B4-BE49-F238E27FC236}">
+                <a16:creationId xmlns:a16="http://schemas.microsoft.com/office/drawing/2014/main" id="{00034215-976A-55E1-896C-B3C32FD19D61}"/>
+              </a:ext>
+            </a:extLst>
+          </p:cNvPr>
+          <p:cNvPicPr>
+            <a:picLocks noChangeAspect="1" noChangeArrowheads="1"/>
+          </p:cNvPicPr>
+          <p:nvPr/>
+        </p:nvPicPr>
+        <p:blipFill>
+          <a:blip r:embed="rId2">
+            <a:extLst>
+              <a:ext uri="{28A0092B-C50C-407E-A947-70E740481C1C}">
+                <a14:useLocalDpi xmlns:a14="http://schemas.microsoft.com/office/drawing/2010/main" val="0"/>
+              </a:ext>
+            </a:extLst>
+          </a:blip>
+          <a:srcRect/>
+          <a:stretch>
+            <a:fillRect/>
+          </a:stretch>
+        </p:blipFill>
+        <p:spPr bwMode="auto">
+          <a:xfrm>
+            <a:off x="562149" y="3182632"/>
+            <a:ext cx="5274788" cy="3324219"/>
+          </a:xfrm>
+          <a:prstGeom prst="rect">
+            <a:avLst/>
+          </a:prstGeom>
+          <a:noFill/>
+          <a:effectLst>
+            <a:outerShdw blurRad="101600" dist="50800" dir="2700000" sx="99000" sy="99000" algn="tl" rotWithShape="0">
+              <a:prstClr val="black">
+                <a:alpha val="40000"/>
+              </a:prstClr>
+            </a:outerShdw>
+          </a:effectLst>
+          <a:extLst>
+            <a:ext uri="{909E8E84-426E-40DD-AFC4-6F175D3DCCD1}">
+              <a14:hiddenFill xmlns:a14="http://schemas.microsoft.com/office/drawing/2010/main">
+                <a:solidFill>
+                  <a:srgbClr val="FFFFFF"/>
+                </a:solidFill>
+              </a14:hiddenFill>
+            </a:ext>
+          </a:extLst>
+        </p:spPr>
+      </p:pic>
+      <p:pic>
+        <p:nvPicPr>
+          <p:cNvPr id="6148" name="Picture 4" descr="Business, Businessman, Chair, Computer, Desk, Desktop">
+            <a:extLst>
+              <a:ext uri="{FF2B5EF4-FFF2-40B4-BE49-F238E27FC236}">
+                <a16:creationId xmlns:a16="http://schemas.microsoft.com/office/drawing/2014/main" id="{523E9D91-FAEF-45D9-827C-6275862FDD07}"/>
+              </a:ext>
+            </a:extLst>
+          </p:cNvPr>
+          <p:cNvPicPr>
+            <a:picLocks noChangeAspect="1" noChangeArrowheads="1"/>
+          </p:cNvPicPr>
+          <p:nvPr/>
+        </p:nvPicPr>
+        <p:blipFill rotWithShape="1">
+          <a:blip r:embed="rId3">
+            <a:extLst>
+              <a:ext uri="{28A0092B-C50C-407E-A947-70E740481C1C}">
+                <a14:useLocalDpi xmlns:a14="http://schemas.microsoft.com/office/drawing/2010/main" val="0"/>
+              </a:ext>
+            </a:extLst>
+          </a:blip>
+          <a:srcRect b="5764"/>
+          <a:stretch/>
+        </p:blipFill>
+        <p:spPr bwMode="auto">
+          <a:xfrm>
+            <a:off x="6355064" y="3182632"/>
+            <a:ext cx="5274788" cy="3324219"/>
+          </a:xfrm>
+          <a:prstGeom prst="rect">
+            <a:avLst/>
+          </a:prstGeom>
+          <a:noFill/>
+          <a:effectLst>
+            <a:outerShdw blurRad="101600" dist="50800" dir="2700000" sx="99000" sy="99000" algn="tl" rotWithShape="0">
+              <a:prstClr val="black">
+                <a:alpha val="40000"/>
+              </a:prstClr>
+            </a:outerShdw>
+          </a:effectLst>
+          <a:extLst>
+            <a:ext uri="{909E8E84-426E-40DD-AFC4-6F175D3DCCD1}">
+              <a14:hiddenFill xmlns:a14="http://schemas.microsoft.com/office/drawing/2010/main">
+                <a:solidFill>
+                  <a:srgbClr val="FFFFFF"/>
+                </a:solidFill>
+              </a14:hiddenFill>
+            </a:ext>
+          </a:extLst>
+        </p:spPr>
+      </p:pic>
+      <p:pic>
+        <p:nvPicPr>
+          <p:cNvPr id="1026" name="Picture 2" descr="worm's-eye-view of white concrete building">
+            <a:extLst>
+              <a:ext uri="{FF2B5EF4-FFF2-40B4-BE49-F238E27FC236}">
+                <a16:creationId xmlns:a16="http://schemas.microsoft.com/office/drawing/2014/main" id="{E3632ECD-7293-6940-71FC-241A304951B1}"/>
+              </a:ext>
+            </a:extLst>
+          </p:cNvPr>
+          <p:cNvPicPr>
+            <a:picLocks noChangeAspect="1" noChangeArrowheads="1"/>
+          </p:cNvPicPr>
+          <p:nvPr/>
+        </p:nvPicPr>
+        <p:blipFill rotWithShape="1">
+          <a:blip r:embed="rId4">
+            <a:extLst>
+              <a:ext uri="{28A0092B-C50C-407E-A947-70E740481C1C}">
+                <a14:useLocalDpi xmlns:a14="http://schemas.microsoft.com/office/drawing/2010/main" val="0"/>
+              </a:ext>
+            </a:extLst>
+          </a:blip>
+          <a:srcRect t="7997" b="80289"/>
+          <a:stretch/>
+        </p:blipFill>
+        <p:spPr bwMode="auto">
+          <a:xfrm>
+            <a:off x="-14514" y="0"/>
+            <a:ext cx="12221028" cy="956312"/>
+          </a:xfrm>
+          <a:prstGeom prst="rect">
+            <a:avLst/>
+          </a:prstGeom>
+          <a:noFill/>
+          <a:extLst>
+            <a:ext uri="{909E8E84-426E-40DD-AFC4-6F175D3DCCD1}">
+              <a14:hiddenFill xmlns:a14="http://schemas.microsoft.com/office/drawing/2010/main">
+                <a:solidFill>
+                  <a:srgbClr val="FFFFFF"/>
+                </a:solidFill>
+              </a14:hiddenFill>
+            </a:ext>
+          </a:extLst>
+        </p:spPr>
+      </p:pic>
+      <p:sp>
+        <p:nvSpPr>
+          <p:cNvPr id="4" name="직사각형 3">
+            <a:extLst>
+              <a:ext uri="{FF2B5EF4-FFF2-40B4-BE49-F238E27FC236}">
+                <a16:creationId xmlns:a16="http://schemas.microsoft.com/office/drawing/2014/main" id="{CB755CBA-C1EC-28CF-BB20-3545AE99B592}"/>
+              </a:ext>
+            </a:extLst>
+          </p:cNvPr>
+          <p:cNvSpPr/>
+          <p:nvPr/>
+        </p:nvSpPr>
+        <p:spPr>
+          <a:xfrm>
+            <a:off x="-14513" y="0"/>
+            <a:ext cx="12221028" cy="956312"/>
+          </a:xfrm>
+          <a:prstGeom prst="rect">
+            <a:avLst/>
+          </a:prstGeom>
+          <a:solidFill>
+            <a:srgbClr val="09293E">
+              <a:alpha val="85000"/>
+            </a:srgbClr>
+          </a:solidFill>
+          <a:ln>
+            <a:noFill/>
+          </a:ln>
+        </p:spPr>
+        <p:style>
+          <a:lnRef idx="2">
+            <a:schemeClr val="accent1">
+              <a:shade val="50000"/>
+            </a:schemeClr>
+          </a:lnRef>
+          <a:fillRef idx="1">
+            <a:schemeClr val="accent1"/>
+          </a:fillRef>
+          <a:effectRef idx="0">
+            <a:schemeClr val="accent1"/>
+          </a:effectRef>
+          <a:fontRef idx="minor">
+            <a:schemeClr val="lt1"/>
+          </a:fontRef>
+        </p:style>
+        <p:txBody>
+          <a:bodyPr rtlCol="0" anchor="ctr"/>
+          <a:lstStyle/>
+          <a:p>
+            <a:pPr algn="ctr"/>
+            <a:endParaRPr lang="ko-KR" altLang="en-US">
+              <a:ln>
+                <a:solidFill>
+                  <a:schemeClr val="accent1">
+                    <a:alpha val="0"/>
+                  </a:schemeClr>
+                </a:solidFill>
+              </a:ln>
+            </a:endParaRPr>
+          </a:p>
+        </p:txBody>
+      </p:sp>
+      <p:sp>
+        <p:nvSpPr>
+          <p:cNvPr id="25" name="TextBox 24">
+            <a:extLst>
+              <a:ext uri="{FF2B5EF4-FFF2-40B4-BE49-F238E27FC236}">
+                <a16:creationId xmlns:a16="http://schemas.microsoft.com/office/drawing/2014/main" id="{E5B44510-0956-0581-AF3F-6E8541293E59}"/>
+              </a:ext>
+            </a:extLst>
+          </p:cNvPr>
+          <p:cNvSpPr txBox="1"/>
+          <p:nvPr/>
+        </p:nvSpPr>
+        <p:spPr>
+          <a:xfrm>
+            <a:off x="285522" y="-29676"/>
+            <a:ext cx="486954" cy="923330"/>
+          </a:xfrm>
+          <a:prstGeom prst="rect">
+            <a:avLst/>
+          </a:prstGeom>
+          <a:noFill/>
+        </p:spPr>
+        <p:txBody>
+          <a:bodyPr wrap="square" rtlCol="0">
+            <a:spAutoFit/>
+          </a:bodyPr>
+          <a:lstStyle/>
+          <a:p>
+            <a:pPr algn="ctr"/>
+            <a:r>
+              <a:rPr lang="en-US" altLang="ko-KR" sz="5400" dirty="0">
+                <a:ln>
+                  <a:solidFill>
+                    <a:schemeClr val="accent1">
+                      <a:alpha val="0"/>
+                    </a:schemeClr>
+                  </a:solidFill>
+                </a:ln>
+                <a:solidFill>
+                  <a:srgbClr val="FFFFFF"/>
+                </a:solidFill>
+                <a:latin typeface="바탕" panose="02030600000101010101" pitchFamily="18" charset="-127"/>
+                <a:ea typeface="바탕" panose="02030600000101010101" pitchFamily="18" charset="-127"/>
+              </a:rPr>
+              <a:t>Ⅱ</a:t>
+            </a:r>
+            <a:endParaRPr lang="ko-KR" altLang="en-US" sz="5400" dirty="0">
+              <a:ln>
+                <a:solidFill>
+                  <a:schemeClr val="accent1">
+                    <a:alpha val="0"/>
+                  </a:schemeClr>
+                </a:solidFill>
+              </a:ln>
+              <a:solidFill>
+                <a:srgbClr val="FFFFFF"/>
+              </a:solidFill>
+              <a:latin typeface="바탕" panose="02030600000101010101" pitchFamily="18" charset="-127"/>
+              <a:ea typeface="바탕" panose="02030600000101010101" pitchFamily="18" charset="-127"/>
+            </a:endParaRPr>
+          </a:p>
+        </p:txBody>
+      </p:sp>
+      <p:grpSp>
+        <p:nvGrpSpPr>
+          <p:cNvPr id="13" name="그룹 12">
+            <a:extLst>
+              <a:ext uri="{FF2B5EF4-FFF2-40B4-BE49-F238E27FC236}">
+                <a16:creationId xmlns:a16="http://schemas.microsoft.com/office/drawing/2014/main" id="{A80A8171-CB0C-2F7A-794C-3811493A5585}"/>
+              </a:ext>
+            </a:extLst>
+          </p:cNvPr>
+          <p:cNvGrpSpPr/>
+          <p:nvPr/>
+        </p:nvGrpSpPr>
+        <p:grpSpPr>
+          <a:xfrm>
+            <a:off x="875584" y="185768"/>
+            <a:ext cx="6908802" cy="627046"/>
+            <a:chOff x="772475" y="185768"/>
+            <a:chExt cx="6908802" cy="627046"/>
+          </a:xfrm>
+        </p:grpSpPr>
+        <p:sp>
+          <p:nvSpPr>
+            <p:cNvPr id="14" name="TextBox 13">
+              <a:extLst>
+                <a:ext uri="{FF2B5EF4-FFF2-40B4-BE49-F238E27FC236}">
+                  <a16:creationId xmlns:a16="http://schemas.microsoft.com/office/drawing/2014/main" id="{47C2D5F5-F857-10CD-2E55-32B5B7A4A37F}"/>
+                </a:ext>
+              </a:extLst>
+            </p:cNvPr>
+            <p:cNvSpPr txBox="1"/>
+            <p:nvPr/>
+          </p:nvSpPr>
+          <p:spPr>
+            <a:xfrm>
+              <a:off x="772477" y="351149"/>
+              <a:ext cx="6908800" cy="461665"/>
+            </a:xfrm>
+            <a:prstGeom prst="rect">
+              <a:avLst/>
+            </a:prstGeom>
+            <a:noFill/>
+          </p:spPr>
+          <p:txBody>
+            <a:bodyPr wrap="square" rtlCol="0">
+              <a:spAutoFit/>
+            </a:bodyPr>
+            <a:lstStyle/>
+            <a:p>
+              <a:r>
+                <a:rPr lang="ko-KR" altLang="en-US" sz="2400" dirty="0" err="1">
+                  <a:ln>
+                    <a:solidFill>
+                      <a:schemeClr val="accent1">
+                        <a:alpha val="0"/>
+                      </a:schemeClr>
+                    </a:solidFill>
+                  </a:ln>
+                  <a:solidFill>
+                    <a:srgbClr val="09E8FF"/>
+                  </a:solidFill>
+                  <a:latin typeface="나눔스퀘어_ac ExtraBold" panose="020B0600000101010101" pitchFamily="50" charset="-127"/>
+                  <a:ea typeface="나눔스퀘어_ac ExtraBold" panose="020B0600000101010101" pitchFamily="50" charset="-127"/>
+                </a:rPr>
+                <a:t>나이스한</a:t>
+              </a:r>
+              <a:r>
+                <a:rPr lang="ko-KR" altLang="en-US" sz="2400" dirty="0">
+                  <a:ln>
+                    <a:solidFill>
+                      <a:schemeClr val="accent1">
+                        <a:alpha val="0"/>
+                      </a:schemeClr>
+                    </a:solidFill>
+                  </a:ln>
+                  <a:solidFill>
+                    <a:srgbClr val="09E8FF"/>
+                  </a:solidFill>
+                  <a:latin typeface="나눔스퀘어_ac ExtraBold" panose="020B0600000101010101" pitchFamily="50" charset="-127"/>
+                  <a:ea typeface="나눔스퀘어_ac ExtraBold" panose="020B0600000101010101" pitchFamily="50" charset="-127"/>
+                </a:rPr>
+                <a:t> 슬라이드의 제목</a:t>
+              </a:r>
+              <a:r>
+                <a:rPr lang="ko-KR" altLang="en-US" sz="2400" dirty="0">
+                  <a:ln>
+                    <a:solidFill>
+                      <a:schemeClr val="accent1">
+                        <a:alpha val="0"/>
+                      </a:schemeClr>
+                    </a:solidFill>
+                  </a:ln>
+                  <a:solidFill>
+                    <a:schemeClr val="bg1"/>
+                  </a:solidFill>
+                  <a:latin typeface="나눔스퀘어_ac ExtraBold" panose="020B0600000101010101" pitchFamily="50" charset="-127"/>
+                  <a:ea typeface="나눔스퀘어_ac ExtraBold" panose="020B0600000101010101" pitchFamily="50" charset="-127"/>
+                </a:rPr>
+                <a:t>을 입력해주세요</a:t>
+              </a:r>
+            </a:p>
+          </p:txBody>
+        </p:sp>
+        <p:sp>
+          <p:nvSpPr>
+            <p:cNvPr id="15" name="TextBox 14">
+              <a:extLst>
+                <a:ext uri="{FF2B5EF4-FFF2-40B4-BE49-F238E27FC236}">
+                  <a16:creationId xmlns:a16="http://schemas.microsoft.com/office/drawing/2014/main" id="{17FD18EB-CCFF-ECE5-0F2C-BB16E3DB5534}"/>
+                </a:ext>
+              </a:extLst>
+            </p:cNvPr>
+            <p:cNvSpPr txBox="1"/>
+            <p:nvPr/>
+          </p:nvSpPr>
+          <p:spPr>
+            <a:xfrm>
+              <a:off x="772475" y="185768"/>
+              <a:ext cx="1492093" cy="246221"/>
+            </a:xfrm>
+            <a:prstGeom prst="rect">
+              <a:avLst/>
+            </a:prstGeom>
+            <a:noFill/>
+          </p:spPr>
+          <p:txBody>
+            <a:bodyPr wrap="square" rtlCol="0">
+              <a:spAutoFit/>
+            </a:bodyPr>
+            <a:lstStyle/>
+            <a:p>
+              <a:r>
+                <a:rPr lang="ko-KR" altLang="en-US" sz="1000" dirty="0">
+                  <a:ln>
+                    <a:solidFill>
+                      <a:schemeClr val="accent1">
+                        <a:alpha val="0"/>
+                      </a:schemeClr>
+                    </a:solidFill>
+                  </a:ln>
+                  <a:solidFill>
+                    <a:srgbClr val="FFFFFF"/>
+                  </a:solidFill>
+                  <a:latin typeface="나눔스퀘어_ac Bold" panose="020B0600000101010101" pitchFamily="50" charset="-127"/>
+                  <a:ea typeface="나눔스퀘어_ac Bold" panose="020B0600000101010101" pitchFamily="50" charset="-127"/>
+                </a:rPr>
+                <a:t>소제목입력 </a:t>
+              </a:r>
+              <a:r>
+                <a:rPr lang="ko-KR" altLang="en-US" sz="1000" dirty="0" err="1">
+                  <a:ln>
+                    <a:solidFill>
+                      <a:schemeClr val="accent1">
+                        <a:alpha val="0"/>
+                      </a:schemeClr>
+                    </a:solidFill>
+                  </a:ln>
+                  <a:solidFill>
+                    <a:srgbClr val="FFFFFF"/>
+                  </a:solidFill>
+                  <a:latin typeface="나눔스퀘어_ac Bold" panose="020B0600000101010101" pitchFamily="50" charset="-127"/>
+                  <a:ea typeface="나눔스퀘어_ac Bold" panose="020B0600000101010101" pitchFamily="50" charset="-127"/>
+                </a:rPr>
+                <a:t>레쓰고</a:t>
+              </a:r>
+              <a:endParaRPr lang="ko-KR" altLang="en-US" sz="1000" dirty="0">
+                <a:ln>
+                  <a:solidFill>
+                    <a:schemeClr val="accent1">
+                      <a:alpha val="0"/>
+                    </a:schemeClr>
+                  </a:solidFill>
+                </a:ln>
+                <a:solidFill>
+                  <a:srgbClr val="FFFFFF"/>
+                </a:solidFill>
+                <a:latin typeface="나눔스퀘어_ac Bold" panose="020B0600000101010101" pitchFamily="50" charset="-127"/>
+                <a:ea typeface="나눔스퀘어_ac Bold" panose="020B0600000101010101" pitchFamily="50" charset="-127"/>
+              </a:endParaRPr>
+            </a:p>
+          </p:txBody>
+        </p:sp>
+      </p:grpSp>
+      <p:sp>
+        <p:nvSpPr>
+          <p:cNvPr id="16" name="TextBox 15">
+            <a:extLst>
+              <a:ext uri="{FF2B5EF4-FFF2-40B4-BE49-F238E27FC236}">
+                <a16:creationId xmlns:a16="http://schemas.microsoft.com/office/drawing/2014/main" id="{8A3A96FF-531F-CE67-6480-1801038DA9D4}"/>
+              </a:ext>
+            </a:extLst>
+          </p:cNvPr>
+          <p:cNvSpPr txBox="1"/>
+          <p:nvPr/>
+        </p:nvSpPr>
+        <p:spPr>
+          <a:xfrm>
+            <a:off x="7324627" y="551204"/>
+            <a:ext cx="4581851" cy="261610"/>
+          </a:xfrm>
+          <a:prstGeom prst="rect">
+            <a:avLst/>
+          </a:prstGeom>
+          <a:noFill/>
+        </p:spPr>
+        <p:txBody>
+          <a:bodyPr wrap="square" rtlCol="0">
+            <a:spAutoFit/>
+          </a:bodyPr>
+          <a:lstStyle/>
+          <a:p>
+            <a:pPr algn="r"/>
+            <a:r>
+              <a:rPr lang="en-US" altLang="ko-KR" sz="1100" dirty="0" err="1">
+                <a:ln>
+                  <a:solidFill>
+                    <a:schemeClr val="accent1">
+                      <a:alpha val="0"/>
+                    </a:schemeClr>
+                  </a:solidFill>
+                </a:ln>
+                <a:solidFill>
+                  <a:srgbClr val="FFFFFF"/>
+                </a:solidFill>
+                <a:latin typeface="나눔스퀘어_ac Bold" panose="020B0600000101010101" pitchFamily="50" charset="-127"/>
+                <a:ea typeface="나눔스퀘어_ac Bold" panose="020B0600000101010101" pitchFamily="50" charset="-127"/>
+              </a:rPr>
+              <a:t>Coporation</a:t>
+            </a:r>
+            <a:r>
+              <a:rPr lang="en-US" altLang="ko-KR" sz="1100" dirty="0">
+                <a:ln>
+                  <a:solidFill>
+                    <a:schemeClr val="accent1">
+                      <a:alpha val="0"/>
+                    </a:schemeClr>
+                  </a:solidFill>
+                </a:ln>
+                <a:solidFill>
+                  <a:srgbClr val="FFFFFF"/>
+                </a:solidFill>
+                <a:latin typeface="나눔스퀘어_ac Bold" panose="020B0600000101010101" pitchFamily="50" charset="-127"/>
+                <a:ea typeface="나눔스퀘어_ac Bold" panose="020B0600000101010101" pitchFamily="50" charset="-127"/>
+              </a:rPr>
+              <a:t> Of PPT Hunter Template Legend</a:t>
+            </a:r>
+            <a:endParaRPr lang="ko-KR" altLang="en-US" sz="1100" dirty="0">
+              <a:ln>
+                <a:solidFill>
+                  <a:schemeClr val="accent1">
+                    <a:alpha val="0"/>
+                  </a:schemeClr>
+                </a:solidFill>
+              </a:ln>
+              <a:solidFill>
+                <a:srgbClr val="FFFFFF"/>
+              </a:solidFill>
+              <a:latin typeface="나눔스퀘어_ac Bold" panose="020B0600000101010101" pitchFamily="50" charset="-127"/>
+              <a:ea typeface="나눔스퀘어_ac Bold" panose="020B0600000101010101" pitchFamily="50" charset="-127"/>
+            </a:endParaRPr>
+          </a:p>
+        </p:txBody>
+      </p:sp>
+      <p:sp>
+        <p:nvSpPr>
+          <p:cNvPr id="17" name="TextBox 16">
+            <a:extLst>
+              <a:ext uri="{FF2B5EF4-FFF2-40B4-BE49-F238E27FC236}">
+                <a16:creationId xmlns:a16="http://schemas.microsoft.com/office/drawing/2014/main" id="{7E5D837A-A56D-4AD8-86C6-E602A2DC7100}"/>
+              </a:ext>
+            </a:extLst>
+          </p:cNvPr>
+          <p:cNvSpPr txBox="1"/>
+          <p:nvPr/>
+        </p:nvSpPr>
+        <p:spPr>
+          <a:xfrm>
+            <a:off x="409575" y="1287747"/>
+            <a:ext cx="3238500" cy="338554"/>
+          </a:xfrm>
+          <a:prstGeom prst="rect">
+            <a:avLst/>
+          </a:prstGeom>
+          <a:noFill/>
+        </p:spPr>
+        <p:txBody>
+          <a:bodyPr wrap="square" rtlCol="0">
+            <a:spAutoFit/>
+          </a:bodyPr>
+          <a:lstStyle>
+            <a:defPPr>
+              <a:defRPr lang="ko-KR"/>
+            </a:defPPr>
+            <a:lvl1pPr>
+              <a:defRPr sz="1600">
+                <a:ln>
+                  <a:solidFill>
+                    <a:schemeClr val="accent1">
+                      <a:alpha val="0"/>
+                    </a:schemeClr>
+                  </a:solidFill>
+                </a:ln>
+                <a:solidFill>
+                  <a:srgbClr val="0A2539"/>
+                </a:solidFill>
+                <a:latin typeface="나눔스퀘어_ac ExtraBold" panose="020B0600000101010101" pitchFamily="50" charset="-127"/>
+                <a:ea typeface="나눔스퀘어_ac ExtraBold" panose="020B0600000101010101" pitchFamily="50" charset="-127"/>
+              </a:defRPr>
+            </a:lvl1pPr>
+          </a:lstStyle>
+          <a:p>
+            <a:r>
+              <a:rPr lang="en-US" altLang="ko-KR" dirty="0">
+                <a:solidFill>
+                  <a:srgbClr val="0D2C3F"/>
+                </a:solidFill>
+              </a:rPr>
+              <a:t>1) </a:t>
+            </a:r>
+            <a:r>
+              <a:rPr lang="ko-KR" altLang="en-US" dirty="0">
+                <a:solidFill>
+                  <a:srgbClr val="0D2C3F"/>
+                </a:solidFill>
+              </a:rPr>
+              <a:t>소제목을 입력해주시기 바랍니다</a:t>
+            </a:r>
+          </a:p>
+        </p:txBody>
+      </p:sp>
+      <p:sp>
+        <p:nvSpPr>
+          <p:cNvPr id="18" name="TextBox 17">
+            <a:extLst>
+              <a:ext uri="{FF2B5EF4-FFF2-40B4-BE49-F238E27FC236}">
+                <a16:creationId xmlns:a16="http://schemas.microsoft.com/office/drawing/2014/main" id="{50D4EB8D-F164-F580-C49D-502558F1242E}"/>
+              </a:ext>
+            </a:extLst>
+          </p:cNvPr>
+          <p:cNvSpPr txBox="1"/>
+          <p:nvPr/>
+        </p:nvSpPr>
+        <p:spPr>
+          <a:xfrm>
+            <a:off x="875584" y="1647062"/>
+            <a:ext cx="10896175" cy="1353897"/>
+          </a:xfrm>
+          <a:prstGeom prst="rect">
+            <a:avLst/>
+          </a:prstGeom>
+          <a:noFill/>
+        </p:spPr>
+        <p:txBody>
+          <a:bodyPr wrap="square" rtlCol="0">
+            <a:spAutoFit/>
+          </a:bodyPr>
+          <a:lstStyle/>
+          <a:p>
+            <a:pPr>
+              <a:lnSpc>
+                <a:spcPct val="150000"/>
+              </a:lnSpc>
+            </a:pPr>
+            <a:r>
+              <a:rPr lang="ko-KR" altLang="en-US" sz="1400" dirty="0">
+                <a:ln>
+                  <a:solidFill>
+                    <a:schemeClr val="accent1">
+                      <a:alpha val="0"/>
+                    </a:schemeClr>
+                  </a:solidFill>
+                </a:ln>
+                <a:latin typeface="나눔스퀘어_ac" panose="020B0600000101010101" pitchFamily="50" charset="-127"/>
+                <a:ea typeface="나눔스퀘어_ac" panose="020B0600000101010101" pitchFamily="50" charset="-127"/>
+              </a:rPr>
+              <a:t>사실 진짜 </a:t>
+            </a:r>
+            <a:r>
+              <a:rPr lang="ko-KR" altLang="en-US" sz="1400" dirty="0" err="1">
+                <a:ln>
+                  <a:solidFill>
+                    <a:schemeClr val="accent1">
+                      <a:alpha val="0"/>
+                    </a:schemeClr>
+                  </a:solidFill>
+                </a:ln>
+                <a:latin typeface="나눔스퀘어_ac" panose="020B0600000101010101" pitchFamily="50" charset="-127"/>
+                <a:ea typeface="나눔스퀘어_ac" panose="020B0600000101010101" pitchFamily="50" charset="-127"/>
+              </a:rPr>
+              <a:t>쓸말</a:t>
+            </a:r>
+            <a:r>
+              <a:rPr lang="ko-KR" altLang="en-US" sz="1400" dirty="0">
+                <a:ln>
+                  <a:solidFill>
+                    <a:schemeClr val="accent1">
+                      <a:alpha val="0"/>
+                    </a:schemeClr>
+                  </a:solidFill>
+                </a:ln>
+                <a:latin typeface="나눔스퀘어_ac" panose="020B0600000101010101" pitchFamily="50" charset="-127"/>
+                <a:ea typeface="나눔스퀘어_ac" panose="020B0600000101010101" pitchFamily="50" charset="-127"/>
+              </a:rPr>
+              <a:t> 없는데 나는 원래 </a:t>
+            </a:r>
+            <a:r>
+              <a:rPr lang="ko-KR" altLang="en-US" sz="1400" dirty="0" err="1">
+                <a:ln>
+                  <a:solidFill>
+                    <a:schemeClr val="accent1">
+                      <a:alpha val="0"/>
+                    </a:schemeClr>
+                  </a:solidFill>
+                </a:ln>
+                <a:latin typeface="나눔스퀘어_ac" panose="020B0600000101010101" pitchFamily="50" charset="-127"/>
+                <a:ea typeface="나눔스퀘어_ac" panose="020B0600000101010101" pitchFamily="50" charset="-127"/>
+              </a:rPr>
+              <a:t>짧게짧게</a:t>
+            </a:r>
+            <a:r>
+              <a:rPr lang="ko-KR" altLang="en-US" sz="1400" dirty="0">
+                <a:ln>
+                  <a:solidFill>
+                    <a:schemeClr val="accent1">
+                      <a:alpha val="0"/>
+                    </a:schemeClr>
+                  </a:solidFill>
+                </a:ln>
+                <a:latin typeface="나눔스퀘어_ac" panose="020B0600000101010101" pitchFamily="50" charset="-127"/>
+                <a:ea typeface="나눔스퀘어_ac" panose="020B0600000101010101" pitchFamily="50" charset="-127"/>
+              </a:rPr>
+              <a:t> 조지는 스타일인데</a:t>
+            </a:r>
+            <a:r>
+              <a:rPr lang="en-US" altLang="ko-KR" sz="1400" dirty="0">
+                <a:ln>
+                  <a:solidFill>
+                    <a:schemeClr val="accent1">
+                      <a:alpha val="0"/>
+                    </a:schemeClr>
+                  </a:solidFill>
+                </a:ln>
+                <a:latin typeface="나눔스퀘어_ac" panose="020B0600000101010101" pitchFamily="50" charset="-127"/>
+                <a:ea typeface="나눔스퀘어_ac" panose="020B0600000101010101" pitchFamily="50" charset="-127"/>
+              </a:rPr>
+              <a:t>, </a:t>
+            </a:r>
+            <a:r>
+              <a:rPr lang="ko-KR" altLang="en-US" sz="1400" dirty="0">
+                <a:ln>
+                  <a:solidFill>
+                    <a:schemeClr val="accent1">
+                      <a:alpha val="0"/>
+                    </a:schemeClr>
+                  </a:solidFill>
+                </a:ln>
+                <a:latin typeface="나눔스퀘어_ac" panose="020B0600000101010101" pitchFamily="50" charset="-127"/>
+                <a:ea typeface="나눔스퀘어_ac" panose="020B0600000101010101" pitchFamily="50" charset="-127"/>
+              </a:rPr>
+              <a:t>이 </a:t>
+            </a:r>
+            <a:r>
+              <a:rPr lang="ko-KR" altLang="en-US" sz="1400" dirty="0" err="1">
+                <a:ln>
+                  <a:solidFill>
+                    <a:schemeClr val="accent1">
+                      <a:alpha val="0"/>
+                    </a:schemeClr>
+                  </a:solidFill>
+                </a:ln>
+                <a:latin typeface="나눔스퀘어_ac" panose="020B0600000101010101" pitchFamily="50" charset="-127"/>
+                <a:ea typeface="나눔스퀘어_ac" panose="020B0600000101010101" pitchFamily="50" charset="-127"/>
+              </a:rPr>
+              <a:t>피피피템플릿에서는</a:t>
+            </a:r>
+            <a:r>
+              <a:rPr lang="ko-KR" altLang="en-US" sz="1400" dirty="0">
+                <a:ln>
+                  <a:solidFill>
+                    <a:schemeClr val="accent1">
+                      <a:alpha val="0"/>
+                    </a:schemeClr>
+                  </a:solidFill>
+                </a:ln>
+                <a:latin typeface="나눔스퀘어_ac" panose="020B0600000101010101" pitchFamily="50" charset="-127"/>
+                <a:ea typeface="나눔스퀘어_ac" panose="020B0600000101010101" pitchFamily="50" charset="-127"/>
+              </a:rPr>
+              <a:t> 기본적으로 </a:t>
+            </a:r>
+            <a:r>
+              <a:rPr lang="ko-KR" altLang="en-US" sz="1400" dirty="0" err="1">
+                <a:ln>
+                  <a:solidFill>
+                    <a:schemeClr val="accent1">
+                      <a:alpha val="0"/>
+                    </a:schemeClr>
+                  </a:solidFill>
+                </a:ln>
+                <a:latin typeface="나눔스퀘어_ac" panose="020B0600000101010101" pitchFamily="50" charset="-127"/>
+                <a:ea typeface="나눔스퀘어_ac" panose="020B0600000101010101" pitchFamily="50" charset="-127"/>
+              </a:rPr>
+              <a:t>꽉꽉채워주는</a:t>
+            </a:r>
+            <a:r>
+              <a:rPr lang="ko-KR" altLang="en-US" sz="1400" dirty="0">
+                <a:ln>
+                  <a:solidFill>
+                    <a:schemeClr val="accent1">
+                      <a:alpha val="0"/>
+                    </a:schemeClr>
+                  </a:solidFill>
+                </a:ln>
+                <a:latin typeface="나눔스퀘어_ac" panose="020B0600000101010101" pitchFamily="50" charset="-127"/>
+                <a:ea typeface="나눔스퀘어_ac" panose="020B0600000101010101" pitchFamily="50" charset="-127"/>
+              </a:rPr>
+              <a:t> </a:t>
+            </a:r>
+            <a:r>
+              <a:rPr lang="en-US" altLang="ko-KR" sz="1400" dirty="0">
+                <a:ln>
+                  <a:solidFill>
+                    <a:schemeClr val="accent1">
+                      <a:alpha val="0"/>
+                    </a:schemeClr>
+                  </a:solidFill>
+                </a:ln>
+                <a:latin typeface="나눔스퀘어_ac" panose="020B0600000101010101" pitchFamily="50" charset="-127"/>
+                <a:ea typeface="나눔스퀘어_ac" panose="020B0600000101010101" pitchFamily="50" charset="-127"/>
+              </a:rPr>
+              <a:t>ST</a:t>
+            </a:r>
+            <a:r>
+              <a:rPr lang="ko-KR" altLang="en-US" sz="1400" dirty="0">
+                <a:ln>
+                  <a:solidFill>
+                    <a:schemeClr val="accent1">
+                      <a:alpha val="0"/>
+                    </a:schemeClr>
+                  </a:solidFill>
+                </a:ln>
+                <a:latin typeface="나눔스퀘어_ac" panose="020B0600000101010101" pitchFamily="50" charset="-127"/>
+                <a:ea typeface="나눔스퀘어_ac" panose="020B0600000101010101" pitchFamily="50" charset="-127"/>
+              </a:rPr>
+              <a:t>로 텍스트를 조져줘야 </a:t>
+            </a:r>
+            <a:r>
+              <a:rPr lang="ko-KR" altLang="en-US" sz="1400" dirty="0" err="1">
+                <a:ln>
+                  <a:solidFill>
+                    <a:schemeClr val="accent1">
+                      <a:alpha val="0"/>
+                    </a:schemeClr>
+                  </a:solidFill>
+                </a:ln>
+                <a:latin typeface="나눔스퀘어_ac" panose="020B0600000101010101" pitchFamily="50" charset="-127"/>
+                <a:ea typeface="나눔스퀘어_ac" panose="020B0600000101010101" pitchFamily="50" charset="-127"/>
+              </a:rPr>
+              <a:t>빌드업이</a:t>
+            </a:r>
+            <a:r>
+              <a:rPr lang="ko-KR" altLang="en-US" sz="1400" dirty="0">
+                <a:ln>
+                  <a:solidFill>
+                    <a:schemeClr val="accent1">
+                      <a:alpha val="0"/>
+                    </a:schemeClr>
+                  </a:solidFill>
+                </a:ln>
+                <a:latin typeface="나눔스퀘어_ac" panose="020B0600000101010101" pitchFamily="50" charset="-127"/>
+                <a:ea typeface="나눔스퀘어_ac" panose="020B0600000101010101" pitchFamily="50" charset="-127"/>
+              </a:rPr>
+              <a:t> 가능한 부분이기 때문에 최소 </a:t>
+            </a:r>
+            <a:r>
+              <a:rPr lang="en-US" altLang="ko-KR" sz="1400" dirty="0">
+                <a:ln>
+                  <a:solidFill>
+                    <a:schemeClr val="accent1">
+                      <a:alpha val="0"/>
+                    </a:schemeClr>
+                  </a:solidFill>
+                </a:ln>
+                <a:latin typeface="나눔스퀘어_ac" panose="020B0600000101010101" pitchFamily="50" charset="-127"/>
+                <a:ea typeface="나눔스퀘어_ac" panose="020B0600000101010101" pitchFamily="50" charset="-127"/>
+              </a:rPr>
+              <a:t>2</a:t>
+            </a:r>
+            <a:r>
+              <a:rPr lang="ko-KR" altLang="en-US" sz="1400" dirty="0">
+                <a:ln>
+                  <a:solidFill>
+                    <a:schemeClr val="accent1">
+                      <a:alpha val="0"/>
+                    </a:schemeClr>
+                  </a:solidFill>
+                </a:ln>
+                <a:latin typeface="나눔스퀘어_ac" panose="020B0600000101010101" pitchFamily="50" charset="-127"/>
+                <a:ea typeface="나눔스퀘어_ac" panose="020B0600000101010101" pitchFamily="50" charset="-127"/>
+              </a:rPr>
+              <a:t>줄 반 이상을 써야 이자식이 </a:t>
+            </a:r>
+            <a:r>
+              <a:rPr lang="ko-KR" altLang="en-US" sz="1400" dirty="0" err="1">
+                <a:ln>
+                  <a:solidFill>
+                    <a:schemeClr val="accent1">
+                      <a:alpha val="0"/>
+                    </a:schemeClr>
+                  </a:solidFill>
+                </a:ln>
+                <a:latin typeface="나눔스퀘어_ac" panose="020B0600000101010101" pitchFamily="50" charset="-127"/>
+                <a:ea typeface="나눔스퀘어_ac" panose="020B0600000101010101" pitchFamily="50" charset="-127"/>
+              </a:rPr>
+              <a:t>피피티에</a:t>
+            </a:r>
+            <a:r>
+              <a:rPr lang="ko-KR" altLang="en-US" sz="1400" dirty="0">
+                <a:ln>
+                  <a:solidFill>
+                    <a:schemeClr val="accent1">
+                      <a:alpha val="0"/>
+                    </a:schemeClr>
+                  </a:solidFill>
+                </a:ln>
+                <a:latin typeface="나눔스퀘어_ac" panose="020B0600000101010101" pitchFamily="50" charset="-127"/>
+                <a:ea typeface="나눔스퀘어_ac" panose="020B0600000101010101" pitchFamily="50" charset="-127"/>
+              </a:rPr>
+              <a:t> </a:t>
+            </a:r>
+            <a:r>
+              <a:rPr lang="ko-KR" altLang="en-US" sz="1400" dirty="0" err="1">
+                <a:ln>
+                  <a:solidFill>
+                    <a:schemeClr val="accent1">
+                      <a:alpha val="0"/>
+                    </a:schemeClr>
+                  </a:solidFill>
+                </a:ln>
+                <a:latin typeface="나눔스퀘어_ac" panose="020B0600000101010101" pitchFamily="50" charset="-127"/>
+                <a:ea typeface="나눔스퀘어_ac" panose="020B0600000101010101" pitchFamily="50" charset="-127"/>
+              </a:rPr>
+              <a:t>신경좀</a:t>
+            </a:r>
+            <a:r>
+              <a:rPr lang="ko-KR" altLang="en-US" sz="1400" dirty="0">
+                <a:ln>
+                  <a:solidFill>
+                    <a:schemeClr val="accent1">
+                      <a:alpha val="0"/>
+                    </a:schemeClr>
+                  </a:solidFill>
+                </a:ln>
+                <a:latin typeface="나눔스퀘어_ac" panose="020B0600000101010101" pitchFamily="50" charset="-127"/>
+                <a:ea typeface="나눔스퀘어_ac" panose="020B0600000101010101" pitchFamily="50" charset="-127"/>
+              </a:rPr>
+              <a:t> 썼구나 라고 생각하는 </a:t>
+            </a:r>
+            <a:r>
+              <a:rPr lang="ko-KR" altLang="en-US" sz="1400">
+                <a:ln>
+                  <a:solidFill>
+                    <a:schemeClr val="accent1">
+                      <a:alpha val="0"/>
+                    </a:schemeClr>
+                  </a:solidFill>
+                </a:ln>
+                <a:latin typeface="나눔스퀘어_ac" panose="020B0600000101010101" pitchFamily="50" charset="-127"/>
+                <a:ea typeface="나눔스퀘어_ac" panose="020B0600000101010101" pitchFamily="50" charset="-127"/>
+              </a:rPr>
+              <a:t>꼰대 형님들이 </a:t>
+            </a:r>
+            <a:r>
+              <a:rPr lang="ko-KR" altLang="en-US" sz="1400" dirty="0" err="1">
+                <a:ln>
+                  <a:solidFill>
+                    <a:schemeClr val="accent1">
+                      <a:alpha val="0"/>
+                    </a:schemeClr>
+                  </a:solidFill>
+                </a:ln>
+                <a:latin typeface="나눔스퀘어_ac" panose="020B0600000101010101" pitchFamily="50" charset="-127"/>
+                <a:ea typeface="나눔스퀘어_ac" panose="020B0600000101010101" pitchFamily="50" charset="-127"/>
+              </a:rPr>
+              <a:t>있단말이지</a:t>
+            </a:r>
+            <a:r>
+              <a:rPr lang="en-US" altLang="ko-KR" sz="1400" dirty="0">
+                <a:ln>
+                  <a:solidFill>
+                    <a:schemeClr val="accent1">
+                      <a:alpha val="0"/>
+                    </a:schemeClr>
+                  </a:solidFill>
+                </a:ln>
+                <a:latin typeface="나눔스퀘어_ac" panose="020B0600000101010101" pitchFamily="50" charset="-127"/>
+                <a:ea typeface="나눔스퀘어_ac" panose="020B0600000101010101" pitchFamily="50" charset="-127"/>
+              </a:rPr>
+              <a:t>. </a:t>
+            </a:r>
+            <a:r>
+              <a:rPr lang="ko-KR" altLang="en-US" sz="1400" dirty="0">
+                <a:ln>
+                  <a:solidFill>
+                    <a:schemeClr val="accent1">
+                      <a:alpha val="0"/>
+                    </a:schemeClr>
+                  </a:solidFill>
+                </a:ln>
+                <a:latin typeface="나눔스퀘어_ac" panose="020B0600000101010101" pitchFamily="50" charset="-127"/>
+                <a:ea typeface="나눔스퀘어_ac" panose="020B0600000101010101" pitchFamily="50" charset="-127"/>
+              </a:rPr>
+              <a:t>그래서 열심히 이 템플릿으로 만드는 형님들이 글을 시작하기전에 </a:t>
+            </a:r>
+            <a:r>
+              <a:rPr lang="ko-KR" altLang="en-US" sz="1400">
+                <a:ln>
+                  <a:solidFill>
+                    <a:schemeClr val="accent1">
+                      <a:alpha val="0"/>
+                    </a:schemeClr>
+                  </a:solidFill>
+                </a:ln>
+                <a:latin typeface="나눔스퀘어_ac" panose="020B0600000101010101" pitchFamily="50" charset="-127"/>
+                <a:ea typeface="나눔스퀘어_ac" panose="020B0600000101010101" pitchFamily="50" charset="-127"/>
+              </a:rPr>
+              <a:t>형님들의 꼰상사들을 </a:t>
+            </a:r>
+            <a:r>
+              <a:rPr lang="ko-KR" altLang="en-US" sz="1400" dirty="0">
+                <a:ln>
+                  <a:solidFill>
+                    <a:schemeClr val="accent1">
+                      <a:alpha val="0"/>
+                    </a:schemeClr>
+                  </a:solidFill>
+                </a:ln>
+                <a:latin typeface="나눔스퀘어_ac" panose="020B0600000101010101" pitchFamily="50" charset="-127"/>
+                <a:ea typeface="나눔스퀘어_ac" panose="020B0600000101010101" pitchFamily="50" charset="-127"/>
+              </a:rPr>
+              <a:t>내가 대신 욕하는 </a:t>
+            </a:r>
+            <a:r>
+              <a:rPr lang="en-US" altLang="ko-KR" sz="1400" dirty="0">
+                <a:ln>
+                  <a:solidFill>
+                    <a:schemeClr val="accent1">
+                      <a:alpha val="0"/>
+                    </a:schemeClr>
+                  </a:solidFill>
+                </a:ln>
+                <a:latin typeface="나눔스퀘어_ac" panose="020B0600000101010101" pitchFamily="50" charset="-127"/>
+                <a:ea typeface="나눔스퀘어_ac" panose="020B0600000101010101" pitchFamily="50" charset="-127"/>
+              </a:rPr>
+              <a:t>ST</a:t>
+            </a:r>
+            <a:r>
+              <a:rPr lang="ko-KR" altLang="en-US" sz="1400">
+                <a:ln>
+                  <a:solidFill>
+                    <a:schemeClr val="accent1">
+                      <a:alpha val="0"/>
+                    </a:schemeClr>
+                  </a:solidFill>
+                </a:ln>
+                <a:latin typeface="나눔스퀘어_ac" panose="020B0600000101010101" pitchFamily="50" charset="-127"/>
+                <a:ea typeface="나눔스퀘어_ac" panose="020B0600000101010101" pitchFamily="50" charset="-127"/>
+              </a:rPr>
+              <a:t>로 글을 쓰다보니 어느덧 </a:t>
+            </a:r>
+            <a:r>
+              <a:rPr lang="en-US" altLang="ko-KR" sz="1400">
+                <a:ln>
+                  <a:solidFill>
+                    <a:schemeClr val="accent1">
+                      <a:alpha val="0"/>
+                    </a:schemeClr>
+                  </a:solidFill>
+                </a:ln>
+                <a:latin typeface="나눔스퀘어_ac" panose="020B0600000101010101" pitchFamily="50" charset="-127"/>
+                <a:ea typeface="나눔스퀘어_ac" panose="020B0600000101010101" pitchFamily="50" charset="-127"/>
+              </a:rPr>
+              <a:t>3</a:t>
+            </a:r>
+            <a:r>
+              <a:rPr lang="ko-KR" altLang="en-US" sz="1400">
+                <a:ln>
+                  <a:solidFill>
+                    <a:schemeClr val="accent1">
+                      <a:alpha val="0"/>
+                    </a:schemeClr>
+                  </a:solidFill>
+                </a:ln>
+                <a:latin typeface="나눔스퀘어_ac" panose="020B0600000101010101" pitchFamily="50" charset="-127"/>
+                <a:ea typeface="나눔스퀘어_ac" panose="020B0600000101010101" pitchFamily="50" charset="-127"/>
+              </a:rPr>
+              <a:t>줄바리 이상을 나이스하게 썼단말이지 </a:t>
+            </a:r>
+            <a:r>
+              <a:rPr lang="en-US" altLang="ko-KR" sz="1400">
+                <a:ln>
+                  <a:solidFill>
+                    <a:schemeClr val="accent1">
+                      <a:alpha val="0"/>
+                    </a:schemeClr>
+                  </a:solidFill>
+                </a:ln>
+                <a:latin typeface="나눔스퀘어_ac" panose="020B0600000101010101" pitchFamily="50" charset="-127"/>
+                <a:ea typeface="나눔스퀘어_ac" panose="020B0600000101010101" pitchFamily="50" charset="-127"/>
+              </a:rPr>
+              <a:t>3</a:t>
+            </a:r>
+            <a:r>
+              <a:rPr lang="ko-KR" altLang="en-US" sz="1400">
+                <a:ln>
+                  <a:solidFill>
+                    <a:schemeClr val="accent1">
+                      <a:alpha val="0"/>
+                    </a:schemeClr>
+                  </a:solidFill>
+                </a:ln>
+                <a:latin typeface="나눔스퀘어_ac" panose="020B0600000101010101" pitchFamily="50" charset="-127"/>
+                <a:ea typeface="나눔스퀘어_ac" panose="020B0600000101010101" pitchFamily="50" charset="-127"/>
+              </a:rPr>
+              <a:t>줄 끝까지 채워주고 </a:t>
+            </a:r>
+            <a:r>
+              <a:rPr lang="en-US" altLang="ko-KR" sz="1400">
+                <a:ln>
+                  <a:solidFill>
+                    <a:schemeClr val="accent1">
+                      <a:alpha val="0"/>
+                    </a:schemeClr>
+                  </a:solidFill>
+                </a:ln>
+                <a:latin typeface="나눔스퀘어_ac" panose="020B0600000101010101" pitchFamily="50" charset="-127"/>
+                <a:ea typeface="나눔스퀘어_ac" panose="020B0600000101010101" pitchFamily="50" charset="-127"/>
+              </a:rPr>
+              <a:t>4</a:t>
+            </a:r>
+            <a:r>
+              <a:rPr lang="ko-KR" altLang="en-US" sz="1400">
+                <a:ln>
+                  <a:solidFill>
+                    <a:schemeClr val="accent1">
+                      <a:alpha val="0"/>
+                    </a:schemeClr>
+                  </a:solidFill>
+                </a:ln>
+                <a:latin typeface="나눔스퀘어_ac" panose="020B0600000101010101" pitchFamily="50" charset="-127"/>
+                <a:ea typeface="나눔스퀘어_ac" panose="020B0600000101010101" pitchFamily="50" charset="-127"/>
+              </a:rPr>
+              <a:t>줄 초반에 끝내주는 르낌 </a:t>
+            </a:r>
+            <a:r>
+              <a:rPr lang="en-US" altLang="ko-KR" sz="1400">
+                <a:ln>
+                  <a:solidFill>
+                    <a:schemeClr val="accent1">
+                      <a:alpha val="0"/>
+                    </a:schemeClr>
+                  </a:solidFill>
+                </a:ln>
+                <a:latin typeface="나눔스퀘어_ac" panose="020B0600000101010101" pitchFamily="50" charset="-127"/>
+                <a:ea typeface="나눔스퀘어_ac" panose="020B0600000101010101" pitchFamily="50" charset="-127"/>
+              </a:rPr>
+              <a:t>RG?</a:t>
+            </a:r>
+            <a:endParaRPr lang="ko-KR" altLang="en-US" sz="1400" dirty="0">
+              <a:ln>
+                <a:solidFill>
+                  <a:schemeClr val="accent1">
+                    <a:alpha val="0"/>
+                  </a:schemeClr>
+                </a:solidFill>
+              </a:ln>
+              <a:latin typeface="나눔스퀘어_ac" panose="020B0600000101010101" pitchFamily="50" charset="-127"/>
+              <a:ea typeface="나눔스퀘어_ac" panose="020B0600000101010101" pitchFamily="50" charset="-127"/>
+            </a:endParaRPr>
+          </a:p>
+        </p:txBody>
+      </p:sp>
+      <p:sp>
+        <p:nvSpPr>
+          <p:cNvPr id="21" name="화살표: 갈매기형 수장 20">
+            <a:extLst>
+              <a:ext uri="{FF2B5EF4-FFF2-40B4-BE49-F238E27FC236}">
+                <a16:creationId xmlns:a16="http://schemas.microsoft.com/office/drawing/2014/main" id="{D4741250-E862-7A83-2DD3-1644D66C1157}"/>
+              </a:ext>
+            </a:extLst>
+          </p:cNvPr>
+          <p:cNvSpPr/>
+          <p:nvPr/>
+        </p:nvSpPr>
+        <p:spPr>
+          <a:xfrm>
+            <a:off x="768350" y="1826770"/>
+            <a:ext cx="91281" cy="107156"/>
+          </a:xfrm>
+          <a:prstGeom prst="chevron">
+            <a:avLst/>
+          </a:prstGeom>
+          <a:solidFill>
+            <a:srgbClr val="09E8FF"/>
+          </a:solidFill>
+          <a:ln>
+            <a:noFill/>
+          </a:ln>
+        </p:spPr>
+        <p:style>
+          <a:lnRef idx="2">
+            <a:schemeClr val="accent1">
+              <a:shade val="50000"/>
+            </a:schemeClr>
+          </a:lnRef>
+          <a:fillRef idx="1">
+            <a:schemeClr val="accent1"/>
+          </a:fillRef>
+          <a:effectRef idx="0">
+            <a:schemeClr val="accent1"/>
+          </a:effectRef>
+          <a:fontRef idx="minor">
+            <a:schemeClr val="lt1"/>
+          </a:fontRef>
+        </p:style>
+        <p:txBody>
+          <a:bodyPr rtlCol="0" anchor="ctr"/>
+          <a:lstStyle/>
+          <a:p>
+            <a:pPr algn="ctr"/>
+            <a:endParaRPr lang="ko-KR" altLang="en-US" dirty="0">
+              <a:ln>
+                <a:solidFill>
+                  <a:schemeClr val="accent1">
+                    <a:alpha val="0"/>
+                  </a:schemeClr>
+                </a:solidFill>
+              </a:ln>
+              <a:solidFill>
+                <a:schemeClr val="tx1"/>
+              </a:solidFill>
+            </a:endParaRPr>
+          </a:p>
+        </p:txBody>
+      </p:sp>
+      <p:sp>
+        <p:nvSpPr>
+          <p:cNvPr id="23" name="화살표: 갈매기형 수장 22">
+            <a:extLst>
+              <a:ext uri="{FF2B5EF4-FFF2-40B4-BE49-F238E27FC236}">
+                <a16:creationId xmlns:a16="http://schemas.microsoft.com/office/drawing/2014/main" id="{04F46AE6-8B17-9CA8-A52D-0F69C99BE6EB}"/>
+              </a:ext>
+            </a:extLst>
+          </p:cNvPr>
+          <p:cNvSpPr/>
+          <p:nvPr/>
+        </p:nvSpPr>
+        <p:spPr>
+          <a:xfrm>
+            <a:off x="704056" y="1826770"/>
+            <a:ext cx="91281" cy="107156"/>
+          </a:xfrm>
+          <a:prstGeom prst="chevron">
+            <a:avLst/>
+          </a:prstGeom>
+          <a:solidFill>
+            <a:srgbClr val="0E2C3F"/>
+          </a:solidFill>
+          <a:ln>
+            <a:noFill/>
+          </a:ln>
+        </p:spPr>
+        <p:style>
+          <a:lnRef idx="2">
+            <a:schemeClr val="accent1">
+              <a:shade val="50000"/>
+            </a:schemeClr>
+          </a:lnRef>
+          <a:fillRef idx="1">
+            <a:schemeClr val="accent1"/>
+          </a:fillRef>
+          <a:effectRef idx="0">
+            <a:schemeClr val="accent1"/>
+          </a:effectRef>
+          <a:fontRef idx="minor">
+            <a:schemeClr val="lt1"/>
+          </a:fontRef>
+        </p:style>
+        <p:txBody>
+          <a:bodyPr rtlCol="0" anchor="ctr"/>
+          <a:lstStyle/>
+          <a:p>
+            <a:pPr algn="ctr"/>
+            <a:endParaRPr lang="ko-KR" altLang="en-US">
+              <a:ln>
+                <a:solidFill>
+                  <a:schemeClr val="accent1">
+                    <a:alpha val="0"/>
+                  </a:schemeClr>
+                </a:solidFill>
+              </a:ln>
+              <a:solidFill>
+                <a:schemeClr val="tx1"/>
+              </a:solidFill>
+            </a:endParaRPr>
+          </a:p>
+        </p:txBody>
+      </p:sp>
+    </p:spTree>
+    <p:extLst>
+      <p:ext uri="{BB962C8B-B14F-4D97-AF65-F5344CB8AC3E}">
+        <p14:creationId xmlns:p14="http://schemas.microsoft.com/office/powerpoint/2010/main" val="2266829799"/>
+      </p:ext>
+    </p:extLst>
+  </p:cSld>
+  <p:clrMapOvr>
+    <a:masterClrMapping/>
+  </p:clrMapOvr>
+</p:sld>
+</file>
+
+<file path=ppt/slides/slide11.xml><?xml version="1.0" encoding="utf-8"?>
+<p:sld xmlns:a="http://schemas.openxmlformats.org/drawingml/2006/main" xmlns:r="http://schemas.openxmlformats.org/officeDocument/2006/relationships" xmlns:p="http://schemas.openxmlformats.org/presentationml/2006/main">
+  <p:cSld>
+    <p:spTree>
+      <p:nvGrpSpPr>
+        <p:cNvPr id="1" name=""/>
+        <p:cNvGrpSpPr/>
+        <p:nvPr/>
+      </p:nvGrpSpPr>
+      <p:grpSpPr>
+        <a:xfrm>
+          <a:off x="0" y="0"/>
+          <a:ext cx="0" cy="0"/>
+          <a:chOff x="0" y="0"/>
+          <a:chExt cx="0" cy="0"/>
+        </a:xfrm>
+      </p:grpSpPr>
       <p:sp>
         <p:nvSpPr>
           <p:cNvPr id="32" name="직사각형 31">
@@ -6876,7 +8189,7 @@
 </p:sld>
 </file>
 
-<file path=ppt/slides/slide11.xml><?xml version="1.0" encoding="utf-8"?>
+<file path=ppt/slides/slide12.xml><?xml version="1.0" encoding="utf-8"?>
 <p:sld xmlns:a="http://schemas.openxmlformats.org/drawingml/2006/main" xmlns:r="http://schemas.openxmlformats.org/officeDocument/2006/relationships" xmlns:p="http://schemas.openxmlformats.org/presentationml/2006/main">
   <p:cSld>
     <p:spTree>
@@ -10108,7 +11421,7 @@
 </p:sld>
 </file>
 
-<file path=ppt/slides/slide12.xml><?xml version="1.0" encoding="utf-8"?>
+<file path=ppt/slides/slide13.xml><?xml version="1.0" encoding="utf-8"?>
 <p:sld xmlns:a="http://schemas.openxmlformats.org/drawingml/2006/main" xmlns:r="http://schemas.openxmlformats.org/officeDocument/2006/relationships" xmlns:p="http://schemas.openxmlformats.org/presentationml/2006/main">
   <p:cSld>
     <p:spTree>
@@ -13724,7 +15037,7 @@
 </p:sld>
 </file>
 
-<file path=ppt/slides/slide13.xml><?xml version="1.0" encoding="utf-8"?>
+<file path=ppt/slides/slide14.xml><?xml version="1.0" encoding="utf-8"?>
 <p:sld xmlns:a="http://schemas.openxmlformats.org/drawingml/2006/main" xmlns:r="http://schemas.openxmlformats.org/officeDocument/2006/relationships" xmlns:p="http://schemas.openxmlformats.org/presentationml/2006/main">
   <p:cSld>
     <p:spTree>
@@ -20283,6 +21596,1845 @@
   <p:cSld>
     <p:spTree>
       <p:nvGrpSpPr>
+        <p:cNvPr id="1" name="">
+          <a:extLst>
+            <a:ext uri="{FF2B5EF4-FFF2-40B4-BE49-F238E27FC236}">
+              <a16:creationId xmlns:a16="http://schemas.microsoft.com/office/drawing/2014/main" id="{FC4C49AE-A6A6-BA81-C63F-9FCCC0203813}"/>
+            </a:ext>
+          </a:extLst>
+        </p:cNvPr>
+        <p:cNvGrpSpPr/>
+        <p:nvPr/>
+      </p:nvGrpSpPr>
+      <p:grpSpPr>
+        <a:xfrm>
+          <a:off x="0" y="0"/>
+          <a:ext cx="0" cy="0"/>
+          <a:chOff x="0" y="0"/>
+          <a:chExt cx="0" cy="0"/>
+        </a:xfrm>
+      </p:grpSpPr>
+      <p:pic>
+        <p:nvPicPr>
+          <p:cNvPr id="1026" name="Picture 2" descr="worm's-eye-view of white concrete building">
+            <a:extLst>
+              <a:ext uri="{FF2B5EF4-FFF2-40B4-BE49-F238E27FC236}">
+                <a16:creationId xmlns:a16="http://schemas.microsoft.com/office/drawing/2014/main" id="{39DB4497-EE9C-093B-8DB0-FEEFAD14E536}"/>
+              </a:ext>
+            </a:extLst>
+          </p:cNvPr>
+          <p:cNvPicPr>
+            <a:picLocks noChangeAspect="1" noChangeArrowheads="1"/>
+          </p:cNvPicPr>
+          <p:nvPr/>
+        </p:nvPicPr>
+        <p:blipFill rotWithShape="1">
+          <a:blip r:embed="rId2">
+            <a:extLst>
+              <a:ext uri="{28A0092B-C50C-407E-A947-70E740481C1C}">
+                <a14:useLocalDpi xmlns:a14="http://schemas.microsoft.com/office/drawing/2010/main" val="0"/>
+              </a:ext>
+            </a:extLst>
+          </a:blip>
+          <a:srcRect t="7997" b="80289"/>
+          <a:stretch/>
+        </p:blipFill>
+        <p:spPr bwMode="auto">
+          <a:xfrm>
+            <a:off x="-14514" y="0"/>
+            <a:ext cx="12221028" cy="956312"/>
+          </a:xfrm>
+          <a:prstGeom prst="rect">
+            <a:avLst/>
+          </a:prstGeom>
+          <a:noFill/>
+          <a:extLst>
+            <a:ext uri="{909E8E84-426E-40DD-AFC4-6F175D3DCCD1}">
+              <a14:hiddenFill xmlns:a14="http://schemas.microsoft.com/office/drawing/2010/main">
+                <a:solidFill>
+                  <a:srgbClr val="FFFFFF"/>
+                </a:solidFill>
+              </a14:hiddenFill>
+            </a:ext>
+          </a:extLst>
+        </p:spPr>
+      </p:pic>
+      <p:sp>
+        <p:nvSpPr>
+          <p:cNvPr id="4" name="직사각형 3">
+            <a:extLst>
+              <a:ext uri="{FF2B5EF4-FFF2-40B4-BE49-F238E27FC236}">
+                <a16:creationId xmlns:a16="http://schemas.microsoft.com/office/drawing/2014/main" id="{0494B138-DFE6-FA32-6383-E74C1E6C826F}"/>
+              </a:ext>
+            </a:extLst>
+          </p:cNvPr>
+          <p:cNvSpPr/>
+          <p:nvPr/>
+        </p:nvSpPr>
+        <p:spPr>
+          <a:xfrm>
+            <a:off x="-14513" y="0"/>
+            <a:ext cx="12221028" cy="956312"/>
+          </a:xfrm>
+          <a:prstGeom prst="rect">
+            <a:avLst/>
+          </a:prstGeom>
+          <a:solidFill>
+            <a:srgbClr val="09293E">
+              <a:alpha val="85000"/>
+            </a:srgbClr>
+          </a:solidFill>
+          <a:ln>
+            <a:noFill/>
+          </a:ln>
+        </p:spPr>
+        <p:style>
+          <a:lnRef idx="2">
+            <a:schemeClr val="accent1">
+              <a:shade val="50000"/>
+            </a:schemeClr>
+          </a:lnRef>
+          <a:fillRef idx="1">
+            <a:schemeClr val="accent1"/>
+          </a:fillRef>
+          <a:effectRef idx="0">
+            <a:schemeClr val="accent1"/>
+          </a:effectRef>
+          <a:fontRef idx="minor">
+            <a:schemeClr val="lt1"/>
+          </a:fontRef>
+        </p:style>
+        <p:txBody>
+          <a:bodyPr rtlCol="0" anchor="ctr"/>
+          <a:lstStyle/>
+          <a:p>
+            <a:pPr algn="ctr"/>
+            <a:endParaRPr lang="ko-KR" altLang="en-US">
+              <a:ln>
+                <a:solidFill>
+                  <a:schemeClr val="accent1">
+                    <a:alpha val="0"/>
+                  </a:schemeClr>
+                </a:solidFill>
+              </a:ln>
+            </a:endParaRPr>
+          </a:p>
+        </p:txBody>
+      </p:sp>
+      <p:sp>
+        <p:nvSpPr>
+          <p:cNvPr id="25" name="TextBox 24">
+            <a:extLst>
+              <a:ext uri="{FF2B5EF4-FFF2-40B4-BE49-F238E27FC236}">
+                <a16:creationId xmlns:a16="http://schemas.microsoft.com/office/drawing/2014/main" id="{4C00B40B-4782-E54A-EBE1-DDC11D3ECD01}"/>
+              </a:ext>
+            </a:extLst>
+          </p:cNvPr>
+          <p:cNvSpPr txBox="1"/>
+          <p:nvPr/>
+        </p:nvSpPr>
+        <p:spPr>
+          <a:xfrm>
+            <a:off x="285522" y="-29676"/>
+            <a:ext cx="486954" cy="923330"/>
+          </a:xfrm>
+          <a:prstGeom prst="rect">
+            <a:avLst/>
+          </a:prstGeom>
+          <a:noFill/>
+        </p:spPr>
+        <p:txBody>
+          <a:bodyPr wrap="square" rtlCol="0">
+            <a:spAutoFit/>
+          </a:bodyPr>
+          <a:lstStyle/>
+          <a:p>
+            <a:pPr algn="ctr"/>
+            <a:r>
+              <a:rPr lang="en-US" altLang="ko-KR" sz="5400" dirty="0">
+                <a:ln>
+                  <a:solidFill>
+                    <a:schemeClr val="accent1">
+                      <a:alpha val="0"/>
+                    </a:schemeClr>
+                  </a:solidFill>
+                </a:ln>
+                <a:solidFill>
+                  <a:srgbClr val="FFFFFF"/>
+                </a:solidFill>
+                <a:latin typeface="바탕" panose="02030600000101010101" pitchFamily="18" charset="-127"/>
+                <a:ea typeface="바탕" panose="02030600000101010101" pitchFamily="18" charset="-127"/>
+              </a:rPr>
+              <a:t>Ⅰ</a:t>
+            </a:r>
+            <a:endParaRPr lang="ko-KR" altLang="en-US" sz="5400" dirty="0">
+              <a:ln>
+                <a:solidFill>
+                  <a:schemeClr val="accent1">
+                    <a:alpha val="0"/>
+                  </a:schemeClr>
+                </a:solidFill>
+              </a:ln>
+              <a:solidFill>
+                <a:srgbClr val="FFFFFF"/>
+              </a:solidFill>
+              <a:latin typeface="바탕" panose="02030600000101010101" pitchFamily="18" charset="-127"/>
+              <a:ea typeface="바탕" panose="02030600000101010101" pitchFamily="18" charset="-127"/>
+            </a:endParaRPr>
+          </a:p>
+        </p:txBody>
+      </p:sp>
+      <p:sp>
+        <p:nvSpPr>
+          <p:cNvPr id="31" name="TextBox 30">
+            <a:extLst>
+              <a:ext uri="{FF2B5EF4-FFF2-40B4-BE49-F238E27FC236}">
+                <a16:creationId xmlns:a16="http://schemas.microsoft.com/office/drawing/2014/main" id="{F04B4983-BB8C-D6BB-C398-DAD1BB2CEB39}"/>
+              </a:ext>
+            </a:extLst>
+          </p:cNvPr>
+          <p:cNvSpPr txBox="1"/>
+          <p:nvPr/>
+        </p:nvSpPr>
+        <p:spPr>
+          <a:xfrm>
+            <a:off x="7324627" y="551204"/>
+            <a:ext cx="4581851" cy="261610"/>
+          </a:xfrm>
+          <a:prstGeom prst="rect">
+            <a:avLst/>
+          </a:prstGeom>
+          <a:noFill/>
+        </p:spPr>
+        <p:txBody>
+          <a:bodyPr wrap="square" rtlCol="0">
+            <a:spAutoFit/>
+          </a:bodyPr>
+          <a:lstStyle/>
+          <a:p>
+            <a:pPr algn="r"/>
+            <a:r>
+              <a:rPr lang="en-US" altLang="ko-KR" sz="1100" dirty="0" err="1">
+                <a:ln>
+                  <a:solidFill>
+                    <a:schemeClr val="accent1">
+                      <a:alpha val="0"/>
+                    </a:schemeClr>
+                  </a:solidFill>
+                </a:ln>
+                <a:solidFill>
+                  <a:srgbClr val="FFFFFF"/>
+                </a:solidFill>
+                <a:latin typeface="나눔스퀘어_ac Bold" panose="020B0600000101010101" pitchFamily="50" charset="-127"/>
+                <a:ea typeface="나눔스퀘어_ac Bold" panose="020B0600000101010101" pitchFamily="50" charset="-127"/>
+              </a:rPr>
+              <a:t>Coporation</a:t>
+            </a:r>
+            <a:r>
+              <a:rPr lang="en-US" altLang="ko-KR" sz="1100" dirty="0">
+                <a:ln>
+                  <a:solidFill>
+                    <a:schemeClr val="accent1">
+                      <a:alpha val="0"/>
+                    </a:schemeClr>
+                  </a:solidFill>
+                </a:ln>
+                <a:solidFill>
+                  <a:srgbClr val="FFFFFF"/>
+                </a:solidFill>
+                <a:latin typeface="나눔스퀘어_ac Bold" panose="020B0600000101010101" pitchFamily="50" charset="-127"/>
+                <a:ea typeface="나눔스퀘어_ac Bold" panose="020B0600000101010101" pitchFamily="50" charset="-127"/>
+              </a:rPr>
+              <a:t> Of PPT Hunter Template Legend</a:t>
+            </a:r>
+            <a:endParaRPr lang="ko-KR" altLang="en-US" sz="1100" dirty="0">
+              <a:ln>
+                <a:solidFill>
+                  <a:schemeClr val="accent1">
+                    <a:alpha val="0"/>
+                  </a:schemeClr>
+                </a:solidFill>
+              </a:ln>
+              <a:solidFill>
+                <a:srgbClr val="FFFFFF"/>
+              </a:solidFill>
+              <a:latin typeface="나눔스퀘어_ac Bold" panose="020B0600000101010101" pitchFamily="50" charset="-127"/>
+              <a:ea typeface="나눔스퀘어_ac Bold" panose="020B0600000101010101" pitchFamily="50" charset="-127"/>
+            </a:endParaRPr>
+          </a:p>
+        </p:txBody>
+      </p:sp>
+      <p:sp>
+        <p:nvSpPr>
+          <p:cNvPr id="36" name="TextBox 35">
+            <a:extLst>
+              <a:ext uri="{FF2B5EF4-FFF2-40B4-BE49-F238E27FC236}">
+                <a16:creationId xmlns:a16="http://schemas.microsoft.com/office/drawing/2014/main" id="{3652557A-D89B-C789-9F7C-55122247ED5E}"/>
+              </a:ext>
+            </a:extLst>
+          </p:cNvPr>
+          <p:cNvSpPr txBox="1"/>
+          <p:nvPr/>
+        </p:nvSpPr>
+        <p:spPr>
+          <a:xfrm>
+            <a:off x="875586" y="351149"/>
+            <a:ext cx="6908800" cy="461665"/>
+          </a:xfrm>
+          <a:prstGeom prst="rect">
+            <a:avLst/>
+          </a:prstGeom>
+          <a:noFill/>
+        </p:spPr>
+        <p:txBody>
+          <a:bodyPr wrap="square" rtlCol="0">
+            <a:spAutoFit/>
+          </a:bodyPr>
+          <a:lstStyle/>
+          <a:p>
+            <a:r>
+              <a:rPr lang="en-US" altLang="ko-KR" sz="2400" dirty="0">
+                <a:ln>
+                  <a:solidFill>
+                    <a:schemeClr val="accent1">
+                      <a:alpha val="0"/>
+                    </a:schemeClr>
+                  </a:solidFill>
+                </a:ln>
+                <a:solidFill>
+                  <a:srgbClr val="09E8FF"/>
+                </a:solidFill>
+                <a:latin typeface="나눔스퀘어_ac ExtraBold" panose="020B0600000101010101" pitchFamily="50" charset="-127"/>
+                <a:ea typeface="나눔스퀘어_ac ExtraBold" panose="020B0600000101010101" pitchFamily="50" charset="-127"/>
+              </a:rPr>
+              <a:t>pandas</a:t>
+            </a:r>
+            <a:endParaRPr lang="ko-KR" altLang="en-US" sz="2400" dirty="0">
+              <a:ln>
+                <a:solidFill>
+                  <a:schemeClr val="accent1">
+                    <a:alpha val="0"/>
+                  </a:schemeClr>
+                </a:solidFill>
+              </a:ln>
+              <a:solidFill>
+                <a:schemeClr val="bg1"/>
+              </a:solidFill>
+              <a:latin typeface="나눔스퀘어_ac ExtraBold" panose="020B0600000101010101" pitchFamily="50" charset="-127"/>
+              <a:ea typeface="나눔스퀘어_ac ExtraBold" panose="020B0600000101010101" pitchFamily="50" charset="-127"/>
+            </a:endParaRPr>
+          </a:p>
+        </p:txBody>
+      </p:sp>
+      <p:sp>
+        <p:nvSpPr>
+          <p:cNvPr id="37" name="TextBox 36">
+            <a:extLst>
+              <a:ext uri="{FF2B5EF4-FFF2-40B4-BE49-F238E27FC236}">
+                <a16:creationId xmlns:a16="http://schemas.microsoft.com/office/drawing/2014/main" id="{BF00AD51-C379-2076-0133-7177A273F6B0}"/>
+              </a:ext>
+            </a:extLst>
+          </p:cNvPr>
+          <p:cNvSpPr txBox="1"/>
+          <p:nvPr/>
+        </p:nvSpPr>
+        <p:spPr>
+          <a:xfrm>
+            <a:off x="875584" y="185768"/>
+            <a:ext cx="1492093" cy="246221"/>
+          </a:xfrm>
+          <a:prstGeom prst="rect">
+            <a:avLst/>
+          </a:prstGeom>
+          <a:noFill/>
+        </p:spPr>
+        <p:txBody>
+          <a:bodyPr wrap="square" rtlCol="0">
+            <a:spAutoFit/>
+          </a:bodyPr>
+          <a:lstStyle/>
+          <a:p>
+            <a:r>
+              <a:rPr lang="ko-KR" altLang="en-US" sz="1000" dirty="0">
+                <a:ln>
+                  <a:solidFill>
+                    <a:schemeClr val="accent1">
+                      <a:alpha val="0"/>
+                    </a:schemeClr>
+                  </a:solidFill>
+                </a:ln>
+                <a:solidFill>
+                  <a:srgbClr val="FFFFFF"/>
+                </a:solidFill>
+                <a:latin typeface="나눔스퀘어_ac Bold" panose="020B0600000101010101" pitchFamily="50" charset="-127"/>
+                <a:ea typeface="나눔스퀘어_ac Bold" panose="020B0600000101010101" pitchFamily="50" charset="-127"/>
+              </a:rPr>
+              <a:t>소제목입력 </a:t>
+            </a:r>
+            <a:r>
+              <a:rPr lang="ko-KR" altLang="en-US" sz="1000" dirty="0" err="1">
+                <a:ln>
+                  <a:solidFill>
+                    <a:schemeClr val="accent1">
+                      <a:alpha val="0"/>
+                    </a:schemeClr>
+                  </a:solidFill>
+                </a:ln>
+                <a:solidFill>
+                  <a:srgbClr val="FFFFFF"/>
+                </a:solidFill>
+                <a:latin typeface="나눔스퀘어_ac Bold" panose="020B0600000101010101" pitchFamily="50" charset="-127"/>
+                <a:ea typeface="나눔스퀘어_ac Bold" panose="020B0600000101010101" pitchFamily="50" charset="-127"/>
+              </a:rPr>
+              <a:t>레쓰고</a:t>
+            </a:r>
+            <a:endParaRPr lang="ko-KR" altLang="en-US" sz="1000" dirty="0">
+              <a:ln>
+                <a:solidFill>
+                  <a:schemeClr val="accent1">
+                    <a:alpha val="0"/>
+                  </a:schemeClr>
+                </a:solidFill>
+              </a:ln>
+              <a:solidFill>
+                <a:srgbClr val="FFFFFF"/>
+              </a:solidFill>
+              <a:latin typeface="나눔스퀘어_ac Bold" panose="020B0600000101010101" pitchFamily="50" charset="-127"/>
+              <a:ea typeface="나눔스퀘어_ac Bold" panose="020B0600000101010101" pitchFamily="50" charset="-127"/>
+            </a:endParaRPr>
+          </a:p>
+        </p:txBody>
+      </p:sp>
+      <p:sp>
+        <p:nvSpPr>
+          <p:cNvPr id="3" name="사각형: 둥근 모서리 2">
+            <a:extLst>
+              <a:ext uri="{FF2B5EF4-FFF2-40B4-BE49-F238E27FC236}">
+                <a16:creationId xmlns:a16="http://schemas.microsoft.com/office/drawing/2014/main" id="{3D3F6094-452E-AD50-A618-8903BABD31D7}"/>
+              </a:ext>
+            </a:extLst>
+          </p:cNvPr>
+          <p:cNvSpPr/>
+          <p:nvPr/>
+        </p:nvSpPr>
+        <p:spPr>
+          <a:xfrm>
+            <a:off x="801328" y="1460100"/>
+            <a:ext cx="801328" cy="348792"/>
+          </a:xfrm>
+          <a:prstGeom prst="roundRect">
+            <a:avLst/>
+          </a:prstGeom>
+          <a:solidFill>
+            <a:srgbClr val="0A2539"/>
+          </a:solidFill>
+          <a:ln>
+            <a:noFill/>
+          </a:ln>
+        </p:spPr>
+        <p:style>
+          <a:lnRef idx="2">
+            <a:schemeClr val="accent1">
+              <a:shade val="50000"/>
+            </a:schemeClr>
+          </a:lnRef>
+          <a:fillRef idx="1">
+            <a:schemeClr val="accent1"/>
+          </a:fillRef>
+          <a:effectRef idx="0">
+            <a:schemeClr val="accent1"/>
+          </a:effectRef>
+          <a:fontRef idx="minor">
+            <a:schemeClr val="lt1"/>
+          </a:fontRef>
+        </p:style>
+        <p:txBody>
+          <a:bodyPr rtlCol="0" anchor="ctr"/>
+          <a:lstStyle/>
+          <a:p>
+            <a:pPr algn="ctr"/>
+            <a:r>
+              <a:rPr lang="en-US" altLang="ko-KR" sz="1600" dirty="0">
+                <a:ln>
+                  <a:solidFill>
+                    <a:schemeClr val="accent1">
+                      <a:alpha val="0"/>
+                    </a:schemeClr>
+                  </a:solidFill>
+                </a:ln>
+                <a:latin typeface="나눔스퀘어_ac ExtraBold" panose="020B0600000101010101" pitchFamily="50" charset="-127"/>
+                <a:ea typeface="나눔스퀘어_ac ExtraBold" panose="020B0600000101010101" pitchFamily="50" charset="-127"/>
+              </a:rPr>
+              <a:t>1</a:t>
+            </a:r>
+            <a:endParaRPr lang="ko-KR" altLang="en-US" sz="1600" dirty="0">
+              <a:ln>
+                <a:solidFill>
+                  <a:schemeClr val="accent1">
+                    <a:alpha val="0"/>
+                  </a:schemeClr>
+                </a:solidFill>
+              </a:ln>
+              <a:latin typeface="나눔스퀘어_ac ExtraBold" panose="020B0600000101010101" pitchFamily="50" charset="-127"/>
+              <a:ea typeface="나눔스퀘어_ac ExtraBold" panose="020B0600000101010101" pitchFamily="50" charset="-127"/>
+            </a:endParaRPr>
+          </a:p>
+        </p:txBody>
+      </p:sp>
+      <p:graphicFrame>
+        <p:nvGraphicFramePr>
+          <p:cNvPr id="5" name="표 4">
+            <a:extLst>
+              <a:ext uri="{FF2B5EF4-FFF2-40B4-BE49-F238E27FC236}">
+                <a16:creationId xmlns:a16="http://schemas.microsoft.com/office/drawing/2014/main" id="{FB6513F4-F5B8-4AD9-571F-E539CB7D837D}"/>
+              </a:ext>
+            </a:extLst>
+          </p:cNvPr>
+          <p:cNvGraphicFramePr>
+            <a:graphicFrameLocks noGrp="1"/>
+          </p:cNvGraphicFramePr>
+          <p:nvPr/>
+        </p:nvGraphicFramePr>
+        <p:xfrm>
+          <a:off x="838200" y="2288940"/>
+          <a:ext cx="10515600" cy="3108960"/>
+        </p:xfrm>
+        <a:graphic>
+          <a:graphicData uri="http://schemas.openxmlformats.org/drawingml/2006/table">
+            <a:tbl>
+              <a:tblPr/>
+              <a:tblGrid>
+                <a:gridCol w="3505200">
+                  <a:extLst>
+                    <a:ext uri="{9D8B030D-6E8A-4147-A177-3AD203B41FA5}">
+                      <a16:colId xmlns:a16="http://schemas.microsoft.com/office/drawing/2014/main" val="2809600744"/>
+                    </a:ext>
+                  </a:extLst>
+                </a:gridCol>
+                <a:gridCol w="3505200">
+                  <a:extLst>
+                    <a:ext uri="{9D8B030D-6E8A-4147-A177-3AD203B41FA5}">
+                      <a16:colId xmlns:a16="http://schemas.microsoft.com/office/drawing/2014/main" val="1747183328"/>
+                    </a:ext>
+                  </a:extLst>
+                </a:gridCol>
+                <a:gridCol w="3505200">
+                  <a:extLst>
+                    <a:ext uri="{9D8B030D-6E8A-4147-A177-3AD203B41FA5}">
+                      <a16:colId xmlns:a16="http://schemas.microsoft.com/office/drawing/2014/main" val="2287865421"/>
+                    </a:ext>
+                  </a:extLst>
+                </a:gridCol>
+              </a:tblGrid>
+              <a:tr h="0">
+                <a:tc>
+                  <a:txBody>
+                    <a:bodyPr/>
+                    <a:lstStyle/>
+                    <a:p>
+                      <a:pPr algn="ctr">
+                        <a:buNone/>
+                      </a:pPr>
+                      <a:r>
+                        <a:rPr lang="ko-KR" altLang="en-US" b="1" dirty="0">
+                          <a:solidFill>
+                            <a:schemeClr val="bg1"/>
+                          </a:solidFill>
+                        </a:rPr>
+                        <a:t>구분</a:t>
+                      </a:r>
+                    </a:p>
+                  </a:txBody>
+                  <a:tcPr>
+                    <a:lnL>
+                      <a:noFill/>
+                    </a:lnL>
+                    <a:lnR w="3175" cap="flat" cmpd="sng" algn="ctr">
+                      <a:solidFill>
+                        <a:schemeClr val="tx1"/>
+                      </a:solidFill>
+                      <a:prstDash val="solid"/>
+                      <a:round/>
+                      <a:headEnd type="none" w="med" len="med"/>
+                      <a:tailEnd type="none" w="med" len="med"/>
+                    </a:lnR>
+                    <a:lnT w="19050" cap="flat" cmpd="sng" algn="ctr">
+                      <a:solidFill>
+                        <a:schemeClr val="tx1"/>
+                      </a:solidFill>
+                      <a:prstDash val="solid"/>
+                      <a:round/>
+                      <a:headEnd type="none" w="med" len="med"/>
+                      <a:tailEnd type="none" w="med" len="med"/>
+                    </a:lnT>
+                    <a:lnB w="3175" cap="flat" cmpd="sng" algn="ctr">
+                      <a:solidFill>
+                        <a:schemeClr val="tx1"/>
+                      </a:solidFill>
+                      <a:prstDash val="solid"/>
+                      <a:round/>
+                      <a:headEnd type="none" w="med" len="med"/>
+                      <a:tailEnd type="none" w="med" len="med"/>
+                    </a:lnB>
+                    <a:solidFill>
+                      <a:srgbClr val="0E2C3F"/>
+                    </a:solidFill>
+                  </a:tcPr>
+                </a:tc>
+                <a:tc>
+                  <a:txBody>
+                    <a:bodyPr/>
+                    <a:lstStyle/>
+                    <a:p>
+                      <a:pPr algn="ctr">
+                        <a:buNone/>
+                      </a:pPr>
+                      <a:r>
+                        <a:rPr lang="en-US" b="1" dirty="0">
+                          <a:solidFill>
+                            <a:schemeClr val="bg1"/>
+                          </a:solidFill>
+                        </a:rPr>
+                        <a:t>GET</a:t>
+                      </a:r>
+                    </a:p>
+                  </a:txBody>
+                  <a:tcPr>
+                    <a:lnL w="3175" cap="flat" cmpd="sng" algn="ctr">
+                      <a:solidFill>
+                        <a:schemeClr val="tx1"/>
+                      </a:solidFill>
+                      <a:prstDash val="solid"/>
+                      <a:round/>
+                      <a:headEnd type="none" w="med" len="med"/>
+                      <a:tailEnd type="none" w="med" len="med"/>
+                    </a:lnL>
+                    <a:lnR w="3175" cap="flat" cmpd="sng" algn="ctr">
+                      <a:solidFill>
+                        <a:schemeClr val="tx1"/>
+                      </a:solidFill>
+                      <a:prstDash val="solid"/>
+                      <a:round/>
+                      <a:headEnd type="none" w="med" len="med"/>
+                      <a:tailEnd type="none" w="med" len="med"/>
+                    </a:lnR>
+                    <a:lnT w="19050" cap="flat" cmpd="sng" algn="ctr">
+                      <a:solidFill>
+                        <a:schemeClr val="tx1"/>
+                      </a:solidFill>
+                      <a:prstDash val="solid"/>
+                      <a:round/>
+                      <a:headEnd type="none" w="med" len="med"/>
+                      <a:tailEnd type="none" w="med" len="med"/>
+                    </a:lnT>
+                    <a:lnB w="3175" cap="flat" cmpd="sng" algn="ctr">
+                      <a:solidFill>
+                        <a:schemeClr val="tx1"/>
+                      </a:solidFill>
+                      <a:prstDash val="solid"/>
+                      <a:round/>
+                      <a:headEnd type="none" w="med" len="med"/>
+                      <a:tailEnd type="none" w="med" len="med"/>
+                    </a:lnB>
+                    <a:solidFill>
+                      <a:srgbClr val="0E2C3F"/>
+                    </a:solidFill>
+                  </a:tcPr>
+                </a:tc>
+                <a:tc>
+                  <a:txBody>
+                    <a:bodyPr/>
+                    <a:lstStyle/>
+                    <a:p>
+                      <a:pPr algn="ctr">
+                        <a:buNone/>
+                      </a:pPr>
+                      <a:r>
+                        <a:rPr lang="en-US" b="1" dirty="0">
+                          <a:solidFill>
+                            <a:schemeClr val="bg1"/>
+                          </a:solidFill>
+                        </a:rPr>
+                        <a:t>POST</a:t>
+                      </a:r>
+                    </a:p>
+                  </a:txBody>
+                  <a:tcPr>
+                    <a:lnL w="3175" cap="flat" cmpd="sng" algn="ctr">
+                      <a:solidFill>
+                        <a:schemeClr val="tx1"/>
+                      </a:solidFill>
+                      <a:prstDash val="solid"/>
+                      <a:round/>
+                      <a:headEnd type="none" w="med" len="med"/>
+                      <a:tailEnd type="none" w="med" len="med"/>
+                    </a:lnL>
+                    <a:lnR>
+                      <a:noFill/>
+                    </a:lnR>
+                    <a:lnT w="19050" cap="flat" cmpd="sng" algn="ctr">
+                      <a:solidFill>
+                        <a:schemeClr val="tx1"/>
+                      </a:solidFill>
+                      <a:prstDash val="solid"/>
+                      <a:round/>
+                      <a:headEnd type="none" w="med" len="med"/>
+                      <a:tailEnd type="none" w="med" len="med"/>
+                    </a:lnT>
+                    <a:lnB w="3175" cap="flat" cmpd="sng" algn="ctr">
+                      <a:solidFill>
+                        <a:schemeClr val="tx1"/>
+                      </a:solidFill>
+                      <a:prstDash val="solid"/>
+                      <a:round/>
+                      <a:headEnd type="none" w="med" len="med"/>
+                      <a:tailEnd type="none" w="med" len="med"/>
+                    </a:lnB>
+                    <a:solidFill>
+                      <a:srgbClr val="0E2C3F"/>
+                    </a:solidFill>
+                  </a:tcPr>
+                </a:tc>
+                <a:extLst>
+                  <a:ext uri="{0D108BD9-81ED-4DB2-BD59-A6C34878D82A}">
+                    <a16:rowId xmlns:a16="http://schemas.microsoft.com/office/drawing/2014/main" val="106099521"/>
+                  </a:ext>
+                </a:extLst>
+              </a:tr>
+              <a:tr h="0">
+                <a:tc>
+                  <a:txBody>
+                    <a:bodyPr/>
+                    <a:lstStyle/>
+                    <a:p>
+                      <a:pPr algn="ctr">
+                        <a:buNone/>
+                      </a:pPr>
+                      <a:r>
+                        <a:rPr lang="ko-KR" altLang="en-US" b="1" dirty="0"/>
+                        <a:t>의미</a:t>
+                      </a:r>
+                      <a:endParaRPr lang="ko-KR" altLang="en-US" dirty="0"/>
+                    </a:p>
+                  </a:txBody>
+                  <a:tcPr>
+                    <a:lnL>
+                      <a:noFill/>
+                    </a:lnL>
+                    <a:lnR w="3175" cap="flat" cmpd="sng" algn="ctr">
+                      <a:solidFill>
+                        <a:schemeClr val="tx1"/>
+                      </a:solidFill>
+                      <a:prstDash val="solid"/>
+                      <a:round/>
+                      <a:headEnd type="none" w="med" len="med"/>
+                      <a:tailEnd type="none" w="med" len="med"/>
+                    </a:lnR>
+                    <a:lnT w="3175" cap="flat" cmpd="sng" algn="ctr">
+                      <a:solidFill>
+                        <a:schemeClr val="tx1"/>
+                      </a:solidFill>
+                      <a:prstDash val="solid"/>
+                      <a:round/>
+                      <a:headEnd type="none" w="med" len="med"/>
+                      <a:tailEnd type="none" w="med" len="med"/>
+                    </a:lnT>
+                    <a:lnB w="3175" cap="flat" cmpd="sng" algn="ctr">
+                      <a:solidFill>
+                        <a:schemeClr val="tx1"/>
+                      </a:solidFill>
+                      <a:prstDash val="solid"/>
+                      <a:round/>
+                      <a:headEnd type="none" w="med" len="med"/>
+                      <a:tailEnd type="none" w="med" len="med"/>
+                    </a:lnB>
+                    <a:solidFill>
+                      <a:schemeClr val="bg1">
+                        <a:lumMod val="95000"/>
+                      </a:schemeClr>
+                    </a:solidFill>
+                  </a:tcPr>
+                </a:tc>
+                <a:tc>
+                  <a:txBody>
+                    <a:bodyPr/>
+                    <a:lstStyle/>
+                    <a:p>
+                      <a:pPr>
+                        <a:buNone/>
+                      </a:pPr>
+                      <a:r>
+                        <a:rPr lang="ko-KR" altLang="en-US" dirty="0"/>
+                        <a:t>데이터를 </a:t>
+                      </a:r>
+                      <a:r>
+                        <a:rPr lang="ko-KR" altLang="en-US" b="1" dirty="0"/>
+                        <a:t>가져올 때</a:t>
+                      </a:r>
+                      <a:r>
+                        <a:rPr lang="ko-KR" altLang="en-US" dirty="0"/>
+                        <a:t> 사용</a:t>
+                      </a:r>
+                    </a:p>
+                  </a:txBody>
+                  <a:tcPr>
+                    <a:lnL w="3175" cap="flat" cmpd="sng" algn="ctr">
+                      <a:solidFill>
+                        <a:schemeClr val="tx1"/>
+                      </a:solidFill>
+                      <a:prstDash val="solid"/>
+                      <a:round/>
+                      <a:headEnd type="none" w="med" len="med"/>
+                      <a:tailEnd type="none" w="med" len="med"/>
+                    </a:lnL>
+                    <a:lnR w="3175" cap="flat" cmpd="sng" algn="ctr">
+                      <a:solidFill>
+                        <a:schemeClr val="tx1"/>
+                      </a:solidFill>
+                      <a:prstDash val="solid"/>
+                      <a:round/>
+                      <a:headEnd type="none" w="med" len="med"/>
+                      <a:tailEnd type="none" w="med" len="med"/>
+                    </a:lnR>
+                    <a:lnT w="3175" cap="flat" cmpd="sng" algn="ctr">
+                      <a:solidFill>
+                        <a:schemeClr val="tx1"/>
+                      </a:solidFill>
+                      <a:prstDash val="solid"/>
+                      <a:round/>
+                      <a:headEnd type="none" w="med" len="med"/>
+                      <a:tailEnd type="none" w="med" len="med"/>
+                    </a:lnT>
+                    <a:lnB w="3175" cap="flat" cmpd="sng" algn="ctr">
+                      <a:solidFill>
+                        <a:schemeClr val="tx1"/>
+                      </a:solidFill>
+                      <a:prstDash val="solid"/>
+                      <a:round/>
+                      <a:headEnd type="none" w="med" len="med"/>
+                      <a:tailEnd type="none" w="med" len="med"/>
+                    </a:lnB>
+                    <a:noFill/>
+                  </a:tcPr>
+                </a:tc>
+                <a:tc>
+                  <a:txBody>
+                    <a:bodyPr/>
+                    <a:lstStyle/>
+                    <a:p>
+                      <a:pPr>
+                        <a:buNone/>
+                      </a:pPr>
+                      <a:r>
+                        <a:rPr lang="ko-KR" altLang="en-US"/>
+                        <a:t>데이터를 </a:t>
+                      </a:r>
+                      <a:r>
+                        <a:rPr lang="ko-KR" altLang="en-US" b="1"/>
+                        <a:t>보낼 때 </a:t>
+                      </a:r>
+                      <a:r>
+                        <a:rPr lang="en-US" altLang="ko-KR" b="1"/>
+                        <a:t>/ </a:t>
+                      </a:r>
+                      <a:r>
+                        <a:rPr lang="ko-KR" altLang="en-US" b="1"/>
+                        <a:t>저장할 때</a:t>
+                      </a:r>
+                      <a:r>
+                        <a:rPr lang="ko-KR" altLang="en-US"/>
+                        <a:t> 사용</a:t>
+                      </a:r>
+                    </a:p>
+                  </a:txBody>
+                  <a:tcPr>
+                    <a:lnL w="3175" cap="flat" cmpd="sng" algn="ctr">
+                      <a:solidFill>
+                        <a:schemeClr val="tx1"/>
+                      </a:solidFill>
+                      <a:prstDash val="solid"/>
+                      <a:round/>
+                      <a:headEnd type="none" w="med" len="med"/>
+                      <a:tailEnd type="none" w="med" len="med"/>
+                    </a:lnL>
+                    <a:lnR>
+                      <a:noFill/>
+                    </a:lnR>
+                    <a:lnT w="3175" cap="flat" cmpd="sng" algn="ctr">
+                      <a:solidFill>
+                        <a:schemeClr val="tx1"/>
+                      </a:solidFill>
+                      <a:prstDash val="solid"/>
+                      <a:round/>
+                      <a:headEnd type="none" w="med" len="med"/>
+                      <a:tailEnd type="none" w="med" len="med"/>
+                    </a:lnT>
+                    <a:lnB w="3175" cap="flat" cmpd="sng" algn="ctr">
+                      <a:solidFill>
+                        <a:schemeClr val="tx1"/>
+                      </a:solidFill>
+                      <a:prstDash val="solid"/>
+                      <a:round/>
+                      <a:headEnd type="none" w="med" len="med"/>
+                      <a:tailEnd type="none" w="med" len="med"/>
+                    </a:lnB>
+                    <a:noFill/>
+                  </a:tcPr>
+                </a:tc>
+                <a:extLst>
+                  <a:ext uri="{0D108BD9-81ED-4DB2-BD59-A6C34878D82A}">
+                    <a16:rowId xmlns:a16="http://schemas.microsoft.com/office/drawing/2014/main" val="1174675368"/>
+                  </a:ext>
+                </a:extLst>
+              </a:tr>
+              <a:tr h="0">
+                <a:tc>
+                  <a:txBody>
+                    <a:bodyPr/>
+                    <a:lstStyle/>
+                    <a:p>
+                      <a:pPr algn="ctr">
+                        <a:buNone/>
+                      </a:pPr>
+                      <a:r>
+                        <a:rPr lang="ko-KR" altLang="en-US" b="1" dirty="0"/>
+                        <a:t>데이터 전달 위치</a:t>
+                      </a:r>
+                      <a:endParaRPr lang="ko-KR" altLang="en-US" dirty="0"/>
+                    </a:p>
+                  </a:txBody>
+                  <a:tcPr>
+                    <a:lnL>
+                      <a:noFill/>
+                    </a:lnL>
+                    <a:lnR w="3175" cap="flat" cmpd="sng" algn="ctr">
+                      <a:solidFill>
+                        <a:schemeClr val="tx1"/>
+                      </a:solidFill>
+                      <a:prstDash val="solid"/>
+                      <a:round/>
+                      <a:headEnd type="none" w="med" len="med"/>
+                      <a:tailEnd type="none" w="med" len="med"/>
+                    </a:lnR>
+                    <a:lnT w="3175" cap="flat" cmpd="sng" algn="ctr">
+                      <a:solidFill>
+                        <a:schemeClr val="tx1"/>
+                      </a:solidFill>
+                      <a:prstDash val="solid"/>
+                      <a:round/>
+                      <a:headEnd type="none" w="med" len="med"/>
+                      <a:tailEnd type="none" w="med" len="med"/>
+                    </a:lnT>
+                    <a:lnB w="3175" cap="flat" cmpd="sng" algn="ctr">
+                      <a:solidFill>
+                        <a:schemeClr val="tx1"/>
+                      </a:solidFill>
+                      <a:prstDash val="solid"/>
+                      <a:round/>
+                      <a:headEnd type="none" w="med" len="med"/>
+                      <a:tailEnd type="none" w="med" len="med"/>
+                    </a:lnB>
+                    <a:solidFill>
+                      <a:schemeClr val="bg1">
+                        <a:lumMod val="95000"/>
+                      </a:schemeClr>
+                    </a:solidFill>
+                  </a:tcPr>
+                </a:tc>
+                <a:tc>
+                  <a:txBody>
+                    <a:bodyPr/>
+                    <a:lstStyle/>
+                    <a:p>
+                      <a:pPr>
+                        <a:buNone/>
+                      </a:pPr>
+                      <a:r>
+                        <a:rPr lang="en-US" altLang="ko-KR" dirty="0"/>
+                        <a:t>URL(</a:t>
+                      </a:r>
+                      <a:r>
+                        <a:rPr lang="ko-KR" altLang="en-US" dirty="0" err="1"/>
+                        <a:t>주소창</a:t>
+                      </a:r>
+                      <a:r>
+                        <a:rPr lang="en-US" altLang="ko-KR" dirty="0"/>
+                        <a:t>)</a:t>
+                      </a:r>
+                      <a:r>
+                        <a:rPr lang="ko-KR" altLang="en-US" dirty="0"/>
+                        <a:t>에 포함</a:t>
+                      </a:r>
+                    </a:p>
+                  </a:txBody>
+                  <a:tcPr>
+                    <a:lnL w="3175" cap="flat" cmpd="sng" algn="ctr">
+                      <a:solidFill>
+                        <a:schemeClr val="tx1"/>
+                      </a:solidFill>
+                      <a:prstDash val="solid"/>
+                      <a:round/>
+                      <a:headEnd type="none" w="med" len="med"/>
+                      <a:tailEnd type="none" w="med" len="med"/>
+                    </a:lnL>
+                    <a:lnR w="3175" cap="flat" cmpd="sng" algn="ctr">
+                      <a:solidFill>
+                        <a:schemeClr val="tx1"/>
+                      </a:solidFill>
+                      <a:prstDash val="solid"/>
+                      <a:round/>
+                      <a:headEnd type="none" w="med" len="med"/>
+                      <a:tailEnd type="none" w="med" len="med"/>
+                    </a:lnR>
+                    <a:lnT w="3175" cap="flat" cmpd="sng" algn="ctr">
+                      <a:solidFill>
+                        <a:schemeClr val="tx1"/>
+                      </a:solidFill>
+                      <a:prstDash val="solid"/>
+                      <a:round/>
+                      <a:headEnd type="none" w="med" len="med"/>
+                      <a:tailEnd type="none" w="med" len="med"/>
+                    </a:lnT>
+                    <a:lnB w="3175" cap="flat" cmpd="sng" algn="ctr">
+                      <a:solidFill>
+                        <a:schemeClr val="tx1"/>
+                      </a:solidFill>
+                      <a:prstDash val="solid"/>
+                      <a:round/>
+                      <a:headEnd type="none" w="med" len="med"/>
+                      <a:tailEnd type="none" w="med" len="med"/>
+                    </a:lnB>
+                    <a:noFill/>
+                  </a:tcPr>
+                </a:tc>
+                <a:tc>
+                  <a:txBody>
+                    <a:bodyPr/>
+                    <a:lstStyle/>
+                    <a:p>
+                      <a:pPr>
+                        <a:buNone/>
+                      </a:pPr>
+                      <a:r>
+                        <a:rPr lang="en-US" altLang="ko-KR"/>
+                        <a:t>HTTP Body(</a:t>
+                      </a:r>
+                      <a:r>
+                        <a:rPr lang="ko-KR" altLang="en-US"/>
+                        <a:t>본문</a:t>
+                      </a:r>
+                      <a:r>
+                        <a:rPr lang="en-US" altLang="ko-KR"/>
+                        <a:t>)</a:t>
+                      </a:r>
+                      <a:r>
+                        <a:rPr lang="ko-KR" altLang="en-US"/>
+                        <a:t>에 포함</a:t>
+                      </a:r>
+                    </a:p>
+                  </a:txBody>
+                  <a:tcPr>
+                    <a:lnL w="3175" cap="flat" cmpd="sng" algn="ctr">
+                      <a:solidFill>
+                        <a:schemeClr val="tx1"/>
+                      </a:solidFill>
+                      <a:prstDash val="solid"/>
+                      <a:round/>
+                      <a:headEnd type="none" w="med" len="med"/>
+                      <a:tailEnd type="none" w="med" len="med"/>
+                    </a:lnL>
+                    <a:lnR>
+                      <a:noFill/>
+                    </a:lnR>
+                    <a:lnT w="3175" cap="flat" cmpd="sng" algn="ctr">
+                      <a:solidFill>
+                        <a:schemeClr val="tx1"/>
+                      </a:solidFill>
+                      <a:prstDash val="solid"/>
+                      <a:round/>
+                      <a:headEnd type="none" w="med" len="med"/>
+                      <a:tailEnd type="none" w="med" len="med"/>
+                    </a:lnT>
+                    <a:lnB w="3175" cap="flat" cmpd="sng" algn="ctr">
+                      <a:solidFill>
+                        <a:schemeClr val="tx1"/>
+                      </a:solidFill>
+                      <a:prstDash val="solid"/>
+                      <a:round/>
+                      <a:headEnd type="none" w="med" len="med"/>
+                      <a:tailEnd type="none" w="med" len="med"/>
+                    </a:lnB>
+                    <a:noFill/>
+                  </a:tcPr>
+                </a:tc>
+                <a:extLst>
+                  <a:ext uri="{0D108BD9-81ED-4DB2-BD59-A6C34878D82A}">
+                    <a16:rowId xmlns:a16="http://schemas.microsoft.com/office/drawing/2014/main" val="1917946081"/>
+                  </a:ext>
+                </a:extLst>
+              </a:tr>
+              <a:tr h="0">
+                <a:tc>
+                  <a:txBody>
+                    <a:bodyPr/>
+                    <a:lstStyle/>
+                    <a:p>
+                      <a:pPr algn="ctr">
+                        <a:buNone/>
+                      </a:pPr>
+                      <a:r>
+                        <a:rPr lang="ko-KR" altLang="en-US" b="1" dirty="0"/>
+                        <a:t>보안성</a:t>
+                      </a:r>
+                      <a:endParaRPr lang="ko-KR" altLang="en-US" dirty="0"/>
+                    </a:p>
+                  </a:txBody>
+                  <a:tcPr>
+                    <a:lnL>
+                      <a:noFill/>
+                    </a:lnL>
+                    <a:lnR w="3175" cap="flat" cmpd="sng" algn="ctr">
+                      <a:solidFill>
+                        <a:schemeClr val="tx1"/>
+                      </a:solidFill>
+                      <a:prstDash val="solid"/>
+                      <a:round/>
+                      <a:headEnd type="none" w="med" len="med"/>
+                      <a:tailEnd type="none" w="med" len="med"/>
+                    </a:lnR>
+                    <a:lnT w="3175" cap="flat" cmpd="sng" algn="ctr">
+                      <a:solidFill>
+                        <a:schemeClr val="tx1"/>
+                      </a:solidFill>
+                      <a:prstDash val="solid"/>
+                      <a:round/>
+                      <a:headEnd type="none" w="med" len="med"/>
+                      <a:tailEnd type="none" w="med" len="med"/>
+                    </a:lnT>
+                    <a:lnB w="3175" cap="flat" cmpd="sng" algn="ctr">
+                      <a:solidFill>
+                        <a:schemeClr val="tx1"/>
+                      </a:solidFill>
+                      <a:prstDash val="solid"/>
+                      <a:round/>
+                      <a:headEnd type="none" w="med" len="med"/>
+                      <a:tailEnd type="none" w="med" len="med"/>
+                    </a:lnB>
+                    <a:solidFill>
+                      <a:schemeClr val="bg1">
+                        <a:lumMod val="95000"/>
+                      </a:schemeClr>
+                    </a:solidFill>
+                  </a:tcPr>
+                </a:tc>
+                <a:tc>
+                  <a:txBody>
+                    <a:bodyPr/>
+                    <a:lstStyle/>
+                    <a:p>
+                      <a:pPr>
+                        <a:buNone/>
+                      </a:pPr>
+                      <a:r>
+                        <a:rPr lang="ko-KR" altLang="en-US" dirty="0"/>
+                        <a:t>낮음 </a:t>
+                      </a:r>
+                      <a:r>
+                        <a:rPr lang="en-US" altLang="ko-KR" dirty="0"/>
+                        <a:t>(</a:t>
+                      </a:r>
+                      <a:r>
+                        <a:rPr lang="ko-KR" altLang="en-US" dirty="0"/>
+                        <a:t>주소에 노출됨</a:t>
+                      </a:r>
+                      <a:r>
+                        <a:rPr lang="en-US" altLang="ko-KR" dirty="0"/>
+                        <a:t>)</a:t>
+                      </a:r>
+                    </a:p>
+                  </a:txBody>
+                  <a:tcPr>
+                    <a:lnL w="3175" cap="flat" cmpd="sng" algn="ctr">
+                      <a:solidFill>
+                        <a:schemeClr val="tx1"/>
+                      </a:solidFill>
+                      <a:prstDash val="solid"/>
+                      <a:round/>
+                      <a:headEnd type="none" w="med" len="med"/>
+                      <a:tailEnd type="none" w="med" len="med"/>
+                    </a:lnL>
+                    <a:lnR w="3175" cap="flat" cmpd="sng" algn="ctr">
+                      <a:solidFill>
+                        <a:schemeClr val="tx1"/>
+                      </a:solidFill>
+                      <a:prstDash val="solid"/>
+                      <a:round/>
+                      <a:headEnd type="none" w="med" len="med"/>
+                      <a:tailEnd type="none" w="med" len="med"/>
+                    </a:lnR>
+                    <a:lnT w="3175" cap="flat" cmpd="sng" algn="ctr">
+                      <a:solidFill>
+                        <a:schemeClr val="tx1"/>
+                      </a:solidFill>
+                      <a:prstDash val="solid"/>
+                      <a:round/>
+                      <a:headEnd type="none" w="med" len="med"/>
+                      <a:tailEnd type="none" w="med" len="med"/>
+                    </a:lnT>
+                    <a:lnB w="3175" cap="flat" cmpd="sng" algn="ctr">
+                      <a:solidFill>
+                        <a:schemeClr val="tx1"/>
+                      </a:solidFill>
+                      <a:prstDash val="solid"/>
+                      <a:round/>
+                      <a:headEnd type="none" w="med" len="med"/>
+                      <a:tailEnd type="none" w="med" len="med"/>
+                    </a:lnB>
+                    <a:noFill/>
+                  </a:tcPr>
+                </a:tc>
+                <a:tc>
+                  <a:txBody>
+                    <a:bodyPr/>
+                    <a:lstStyle/>
+                    <a:p>
+                      <a:pPr>
+                        <a:buNone/>
+                      </a:pPr>
+                      <a:r>
+                        <a:rPr lang="ko-KR" altLang="en-US"/>
+                        <a:t>높음 </a:t>
+                      </a:r>
+                      <a:r>
+                        <a:rPr lang="en-US" altLang="ko-KR"/>
+                        <a:t>(</a:t>
+                      </a:r>
+                      <a:r>
+                        <a:rPr lang="ko-KR" altLang="en-US"/>
+                        <a:t>본문에 숨겨짐</a:t>
+                      </a:r>
+                      <a:r>
+                        <a:rPr lang="en-US" altLang="ko-KR"/>
+                        <a:t>)</a:t>
+                      </a:r>
+                    </a:p>
+                  </a:txBody>
+                  <a:tcPr>
+                    <a:lnL w="3175" cap="flat" cmpd="sng" algn="ctr">
+                      <a:solidFill>
+                        <a:schemeClr val="tx1"/>
+                      </a:solidFill>
+                      <a:prstDash val="solid"/>
+                      <a:round/>
+                      <a:headEnd type="none" w="med" len="med"/>
+                      <a:tailEnd type="none" w="med" len="med"/>
+                    </a:lnL>
+                    <a:lnR>
+                      <a:noFill/>
+                    </a:lnR>
+                    <a:lnT w="3175" cap="flat" cmpd="sng" algn="ctr">
+                      <a:solidFill>
+                        <a:schemeClr val="tx1"/>
+                      </a:solidFill>
+                      <a:prstDash val="solid"/>
+                      <a:round/>
+                      <a:headEnd type="none" w="med" len="med"/>
+                      <a:tailEnd type="none" w="med" len="med"/>
+                    </a:lnT>
+                    <a:lnB w="3175" cap="flat" cmpd="sng" algn="ctr">
+                      <a:solidFill>
+                        <a:schemeClr val="tx1"/>
+                      </a:solidFill>
+                      <a:prstDash val="solid"/>
+                      <a:round/>
+                      <a:headEnd type="none" w="med" len="med"/>
+                      <a:tailEnd type="none" w="med" len="med"/>
+                    </a:lnB>
+                    <a:noFill/>
+                  </a:tcPr>
+                </a:tc>
+                <a:extLst>
+                  <a:ext uri="{0D108BD9-81ED-4DB2-BD59-A6C34878D82A}">
+                    <a16:rowId xmlns:a16="http://schemas.microsoft.com/office/drawing/2014/main" val="3535946428"/>
+                  </a:ext>
+                </a:extLst>
+              </a:tr>
+              <a:tr h="0">
+                <a:tc>
+                  <a:txBody>
+                    <a:bodyPr/>
+                    <a:lstStyle/>
+                    <a:p>
+                      <a:pPr algn="ctr">
+                        <a:buNone/>
+                      </a:pPr>
+                      <a:r>
+                        <a:rPr lang="ko-KR" altLang="en-US" b="1" dirty="0"/>
+                        <a:t>데이터 크기 제한</a:t>
+                      </a:r>
+                      <a:endParaRPr lang="ko-KR" altLang="en-US" dirty="0"/>
+                    </a:p>
+                  </a:txBody>
+                  <a:tcPr>
+                    <a:lnL>
+                      <a:noFill/>
+                    </a:lnL>
+                    <a:lnR w="3175" cap="flat" cmpd="sng" algn="ctr">
+                      <a:solidFill>
+                        <a:schemeClr val="tx1"/>
+                      </a:solidFill>
+                      <a:prstDash val="solid"/>
+                      <a:round/>
+                      <a:headEnd type="none" w="med" len="med"/>
+                      <a:tailEnd type="none" w="med" len="med"/>
+                    </a:lnR>
+                    <a:lnT w="3175" cap="flat" cmpd="sng" algn="ctr">
+                      <a:solidFill>
+                        <a:schemeClr val="tx1"/>
+                      </a:solidFill>
+                      <a:prstDash val="solid"/>
+                      <a:round/>
+                      <a:headEnd type="none" w="med" len="med"/>
+                      <a:tailEnd type="none" w="med" len="med"/>
+                    </a:lnT>
+                    <a:lnB w="3175" cap="flat" cmpd="sng" algn="ctr">
+                      <a:solidFill>
+                        <a:schemeClr val="tx1"/>
+                      </a:solidFill>
+                      <a:prstDash val="solid"/>
+                      <a:round/>
+                      <a:headEnd type="none" w="med" len="med"/>
+                      <a:tailEnd type="none" w="med" len="med"/>
+                    </a:lnB>
+                    <a:solidFill>
+                      <a:schemeClr val="bg1">
+                        <a:lumMod val="95000"/>
+                      </a:schemeClr>
+                    </a:solidFill>
+                  </a:tcPr>
+                </a:tc>
+                <a:tc>
+                  <a:txBody>
+                    <a:bodyPr/>
+                    <a:lstStyle/>
+                    <a:p>
+                      <a:pPr>
+                        <a:buNone/>
+                      </a:pPr>
+                      <a:r>
+                        <a:rPr lang="ko-KR" altLang="en-US" dirty="0"/>
+                        <a:t>브라우저마다 제한 있음 </a:t>
+                      </a:r>
+                      <a:r>
+                        <a:rPr lang="en-US" altLang="ko-KR" dirty="0"/>
+                        <a:t>(</a:t>
+                      </a:r>
+                      <a:r>
+                        <a:rPr lang="ko-KR" altLang="en-US" dirty="0"/>
+                        <a:t>약 </a:t>
+                      </a:r>
+                      <a:r>
+                        <a:rPr lang="en-US" altLang="ko-KR" dirty="0"/>
+                        <a:t>2~3KB)</a:t>
+                      </a:r>
+                    </a:p>
+                  </a:txBody>
+                  <a:tcPr>
+                    <a:lnL w="3175" cap="flat" cmpd="sng" algn="ctr">
+                      <a:solidFill>
+                        <a:schemeClr val="tx1"/>
+                      </a:solidFill>
+                      <a:prstDash val="solid"/>
+                      <a:round/>
+                      <a:headEnd type="none" w="med" len="med"/>
+                      <a:tailEnd type="none" w="med" len="med"/>
+                    </a:lnL>
+                    <a:lnR w="3175" cap="flat" cmpd="sng" algn="ctr">
+                      <a:solidFill>
+                        <a:schemeClr val="tx1"/>
+                      </a:solidFill>
+                      <a:prstDash val="solid"/>
+                      <a:round/>
+                      <a:headEnd type="none" w="med" len="med"/>
+                      <a:tailEnd type="none" w="med" len="med"/>
+                    </a:lnR>
+                    <a:lnT w="3175" cap="flat" cmpd="sng" algn="ctr">
+                      <a:solidFill>
+                        <a:schemeClr val="tx1"/>
+                      </a:solidFill>
+                      <a:prstDash val="solid"/>
+                      <a:round/>
+                      <a:headEnd type="none" w="med" len="med"/>
+                      <a:tailEnd type="none" w="med" len="med"/>
+                    </a:lnT>
+                    <a:lnB w="3175" cap="flat" cmpd="sng" algn="ctr">
+                      <a:solidFill>
+                        <a:schemeClr val="tx1"/>
+                      </a:solidFill>
+                      <a:prstDash val="solid"/>
+                      <a:round/>
+                      <a:headEnd type="none" w="med" len="med"/>
+                      <a:tailEnd type="none" w="med" len="med"/>
+                    </a:lnB>
+                    <a:noFill/>
+                  </a:tcPr>
+                </a:tc>
+                <a:tc>
+                  <a:txBody>
+                    <a:bodyPr/>
+                    <a:lstStyle/>
+                    <a:p>
+                      <a:pPr>
+                        <a:buNone/>
+                      </a:pPr>
+                      <a:r>
+                        <a:rPr lang="ko-KR" altLang="en-US" dirty="0"/>
+                        <a:t>제한 거의 없음</a:t>
+                      </a:r>
+                    </a:p>
+                  </a:txBody>
+                  <a:tcPr>
+                    <a:lnL w="3175" cap="flat" cmpd="sng" algn="ctr">
+                      <a:solidFill>
+                        <a:schemeClr val="tx1"/>
+                      </a:solidFill>
+                      <a:prstDash val="solid"/>
+                      <a:round/>
+                      <a:headEnd type="none" w="med" len="med"/>
+                      <a:tailEnd type="none" w="med" len="med"/>
+                    </a:lnL>
+                    <a:lnR>
+                      <a:noFill/>
+                    </a:lnR>
+                    <a:lnT w="3175" cap="flat" cmpd="sng" algn="ctr">
+                      <a:solidFill>
+                        <a:schemeClr val="tx1"/>
+                      </a:solidFill>
+                      <a:prstDash val="solid"/>
+                      <a:round/>
+                      <a:headEnd type="none" w="med" len="med"/>
+                      <a:tailEnd type="none" w="med" len="med"/>
+                    </a:lnT>
+                    <a:lnB w="3175" cap="flat" cmpd="sng" algn="ctr">
+                      <a:solidFill>
+                        <a:schemeClr val="tx1"/>
+                      </a:solidFill>
+                      <a:prstDash val="solid"/>
+                      <a:round/>
+                      <a:headEnd type="none" w="med" len="med"/>
+                      <a:tailEnd type="none" w="med" len="med"/>
+                    </a:lnB>
+                    <a:noFill/>
+                  </a:tcPr>
+                </a:tc>
+                <a:extLst>
+                  <a:ext uri="{0D108BD9-81ED-4DB2-BD59-A6C34878D82A}">
+                    <a16:rowId xmlns:a16="http://schemas.microsoft.com/office/drawing/2014/main" val="2656338470"/>
+                  </a:ext>
+                </a:extLst>
+              </a:tr>
+              <a:tr h="0">
+                <a:tc>
+                  <a:txBody>
+                    <a:bodyPr/>
+                    <a:lstStyle/>
+                    <a:p>
+                      <a:pPr algn="ctr">
+                        <a:buNone/>
+                      </a:pPr>
+                      <a:r>
+                        <a:rPr lang="ko-KR" altLang="en-US" b="1" dirty="0"/>
+                        <a:t>사용 예시</a:t>
+                      </a:r>
+                      <a:endParaRPr lang="ko-KR" altLang="en-US" dirty="0"/>
+                    </a:p>
+                  </a:txBody>
+                  <a:tcPr>
+                    <a:lnL>
+                      <a:noFill/>
+                    </a:lnL>
+                    <a:lnR w="3175" cap="flat" cmpd="sng" algn="ctr">
+                      <a:solidFill>
+                        <a:schemeClr val="tx1"/>
+                      </a:solidFill>
+                      <a:prstDash val="solid"/>
+                      <a:round/>
+                      <a:headEnd type="none" w="med" len="med"/>
+                      <a:tailEnd type="none" w="med" len="med"/>
+                    </a:lnR>
+                    <a:lnT w="3175" cap="flat" cmpd="sng" algn="ctr">
+                      <a:solidFill>
+                        <a:schemeClr val="tx1"/>
+                      </a:solidFill>
+                      <a:prstDash val="solid"/>
+                      <a:round/>
+                      <a:headEnd type="none" w="med" len="med"/>
+                      <a:tailEnd type="none" w="med" len="med"/>
+                    </a:lnT>
+                    <a:lnB w="3175" cap="flat" cmpd="sng" algn="ctr">
+                      <a:solidFill>
+                        <a:schemeClr val="tx1"/>
+                      </a:solidFill>
+                      <a:prstDash val="solid"/>
+                      <a:round/>
+                      <a:headEnd type="none" w="med" len="med"/>
+                      <a:tailEnd type="none" w="med" len="med"/>
+                    </a:lnB>
+                    <a:solidFill>
+                      <a:schemeClr val="bg1">
+                        <a:lumMod val="95000"/>
+                      </a:schemeClr>
+                    </a:solidFill>
+                  </a:tcPr>
+                </a:tc>
+                <a:tc>
+                  <a:txBody>
+                    <a:bodyPr/>
+                    <a:lstStyle/>
+                    <a:p>
+                      <a:pPr>
+                        <a:buNone/>
+                      </a:pPr>
+                      <a:r>
+                        <a:rPr lang="ko-KR" altLang="en-US" dirty="0"/>
+                        <a:t>검색</a:t>
+                      </a:r>
+                      <a:r>
+                        <a:rPr lang="en-US" altLang="ko-KR" dirty="0"/>
+                        <a:t>, </a:t>
+                      </a:r>
+                      <a:r>
+                        <a:rPr lang="ko-KR" altLang="en-US" dirty="0"/>
+                        <a:t>조회</a:t>
+                      </a:r>
+                      <a:r>
+                        <a:rPr lang="en-US" altLang="ko-KR" dirty="0"/>
+                        <a:t>, </a:t>
+                      </a:r>
+                      <a:r>
+                        <a:rPr lang="ko-KR" altLang="en-US" dirty="0"/>
+                        <a:t>리스트 불러오기</a:t>
+                      </a:r>
+                    </a:p>
+                  </a:txBody>
+                  <a:tcPr>
+                    <a:lnL w="3175" cap="flat" cmpd="sng" algn="ctr">
+                      <a:solidFill>
+                        <a:schemeClr val="tx1"/>
+                      </a:solidFill>
+                      <a:prstDash val="solid"/>
+                      <a:round/>
+                      <a:headEnd type="none" w="med" len="med"/>
+                      <a:tailEnd type="none" w="med" len="med"/>
+                    </a:lnL>
+                    <a:lnR w="3175" cap="flat" cmpd="sng" algn="ctr">
+                      <a:solidFill>
+                        <a:schemeClr val="tx1"/>
+                      </a:solidFill>
+                      <a:prstDash val="solid"/>
+                      <a:round/>
+                      <a:headEnd type="none" w="med" len="med"/>
+                      <a:tailEnd type="none" w="med" len="med"/>
+                    </a:lnR>
+                    <a:lnT w="3175" cap="flat" cmpd="sng" algn="ctr">
+                      <a:solidFill>
+                        <a:schemeClr val="tx1"/>
+                      </a:solidFill>
+                      <a:prstDash val="solid"/>
+                      <a:round/>
+                      <a:headEnd type="none" w="med" len="med"/>
+                      <a:tailEnd type="none" w="med" len="med"/>
+                    </a:lnT>
+                    <a:lnB w="3175" cap="flat" cmpd="sng" algn="ctr">
+                      <a:solidFill>
+                        <a:schemeClr val="tx1"/>
+                      </a:solidFill>
+                      <a:prstDash val="solid"/>
+                      <a:round/>
+                      <a:headEnd type="none" w="med" len="med"/>
+                      <a:tailEnd type="none" w="med" len="med"/>
+                    </a:lnB>
+                    <a:noFill/>
+                  </a:tcPr>
+                </a:tc>
+                <a:tc>
+                  <a:txBody>
+                    <a:bodyPr/>
+                    <a:lstStyle/>
+                    <a:p>
+                      <a:pPr>
+                        <a:buNone/>
+                      </a:pPr>
+                      <a:r>
+                        <a:rPr lang="ko-KR" altLang="en-US" dirty="0"/>
+                        <a:t>회원가입</a:t>
+                      </a:r>
+                      <a:r>
+                        <a:rPr lang="en-US" altLang="ko-KR" dirty="0"/>
+                        <a:t>, </a:t>
+                      </a:r>
+                      <a:r>
+                        <a:rPr lang="ko-KR" altLang="en-US" dirty="0"/>
+                        <a:t>로그인</a:t>
+                      </a:r>
+                      <a:r>
+                        <a:rPr lang="en-US" altLang="ko-KR" dirty="0"/>
+                        <a:t>, </a:t>
+                      </a:r>
+                      <a:r>
+                        <a:rPr lang="ko-KR" altLang="en-US" dirty="0"/>
+                        <a:t>글쓰기</a:t>
+                      </a:r>
+                    </a:p>
+                  </a:txBody>
+                  <a:tcPr>
+                    <a:lnL w="3175" cap="flat" cmpd="sng" algn="ctr">
+                      <a:solidFill>
+                        <a:schemeClr val="tx1"/>
+                      </a:solidFill>
+                      <a:prstDash val="solid"/>
+                      <a:round/>
+                      <a:headEnd type="none" w="med" len="med"/>
+                      <a:tailEnd type="none" w="med" len="med"/>
+                    </a:lnL>
+                    <a:lnR>
+                      <a:noFill/>
+                    </a:lnR>
+                    <a:lnT w="3175" cap="flat" cmpd="sng" algn="ctr">
+                      <a:solidFill>
+                        <a:schemeClr val="tx1"/>
+                      </a:solidFill>
+                      <a:prstDash val="solid"/>
+                      <a:round/>
+                      <a:headEnd type="none" w="med" len="med"/>
+                      <a:tailEnd type="none" w="med" len="med"/>
+                    </a:lnT>
+                    <a:lnB w="3175" cap="flat" cmpd="sng" algn="ctr">
+                      <a:solidFill>
+                        <a:schemeClr val="tx1"/>
+                      </a:solidFill>
+                      <a:prstDash val="solid"/>
+                      <a:round/>
+                      <a:headEnd type="none" w="med" len="med"/>
+                      <a:tailEnd type="none" w="med" len="med"/>
+                    </a:lnB>
+                    <a:noFill/>
+                  </a:tcPr>
+                </a:tc>
+                <a:extLst>
+                  <a:ext uri="{0D108BD9-81ED-4DB2-BD59-A6C34878D82A}">
+                    <a16:rowId xmlns:a16="http://schemas.microsoft.com/office/drawing/2014/main" val="3713293744"/>
+                  </a:ext>
+                </a:extLst>
+              </a:tr>
+              <a:tr h="0">
+                <a:tc>
+                  <a:txBody>
+                    <a:bodyPr/>
+                    <a:lstStyle/>
+                    <a:p>
+                      <a:pPr algn="ctr">
+                        <a:buNone/>
+                      </a:pPr>
+                      <a:r>
+                        <a:rPr lang="ko-KR" altLang="en-US" b="1" dirty="0"/>
+                        <a:t>캐시 가능 여부</a:t>
+                      </a:r>
+                      <a:endParaRPr lang="ko-KR" altLang="en-US" dirty="0"/>
+                    </a:p>
+                  </a:txBody>
+                  <a:tcPr>
+                    <a:lnL>
+                      <a:noFill/>
+                    </a:lnL>
+                    <a:lnR w="3175" cap="flat" cmpd="sng" algn="ctr">
+                      <a:solidFill>
+                        <a:schemeClr val="tx1"/>
+                      </a:solidFill>
+                      <a:prstDash val="solid"/>
+                      <a:round/>
+                      <a:headEnd type="none" w="med" len="med"/>
+                      <a:tailEnd type="none" w="med" len="med"/>
+                    </a:lnR>
+                    <a:lnT w="3175" cap="flat" cmpd="sng" algn="ctr">
+                      <a:solidFill>
+                        <a:schemeClr val="tx1"/>
+                      </a:solidFill>
+                      <a:prstDash val="solid"/>
+                      <a:round/>
+                      <a:headEnd type="none" w="med" len="med"/>
+                      <a:tailEnd type="none" w="med" len="med"/>
+                    </a:lnT>
+                    <a:lnB w="19050" cap="flat" cmpd="sng" algn="ctr">
+                      <a:solidFill>
+                        <a:schemeClr val="tx1"/>
+                      </a:solidFill>
+                      <a:prstDash val="solid"/>
+                      <a:round/>
+                      <a:headEnd type="none" w="med" len="med"/>
+                      <a:tailEnd type="none" w="med" len="med"/>
+                    </a:lnB>
+                    <a:solidFill>
+                      <a:schemeClr val="bg1">
+                        <a:lumMod val="95000"/>
+                      </a:schemeClr>
+                    </a:solidFill>
+                  </a:tcPr>
+                </a:tc>
+                <a:tc>
+                  <a:txBody>
+                    <a:bodyPr/>
+                    <a:lstStyle/>
+                    <a:p>
+                      <a:pPr>
+                        <a:buNone/>
+                      </a:pPr>
+                      <a:r>
+                        <a:rPr lang="ko-KR" altLang="en-US" dirty="0"/>
+                        <a:t>가능 </a:t>
+                      </a:r>
+                      <a:r>
+                        <a:rPr lang="en-US" altLang="ko-KR" dirty="0"/>
+                        <a:t>(</a:t>
+                      </a:r>
+                      <a:r>
+                        <a:rPr lang="ko-KR" altLang="en-US" dirty="0"/>
+                        <a:t>브라우저가 캐시 저장</a:t>
+                      </a:r>
+                      <a:r>
+                        <a:rPr lang="en-US" altLang="ko-KR" dirty="0"/>
+                        <a:t>)</a:t>
+                      </a:r>
+                    </a:p>
+                  </a:txBody>
+                  <a:tcPr>
+                    <a:lnL w="3175" cap="flat" cmpd="sng" algn="ctr">
+                      <a:solidFill>
+                        <a:schemeClr val="tx1"/>
+                      </a:solidFill>
+                      <a:prstDash val="solid"/>
+                      <a:round/>
+                      <a:headEnd type="none" w="med" len="med"/>
+                      <a:tailEnd type="none" w="med" len="med"/>
+                    </a:lnL>
+                    <a:lnR w="3175" cap="flat" cmpd="sng" algn="ctr">
+                      <a:solidFill>
+                        <a:schemeClr val="tx1"/>
+                      </a:solidFill>
+                      <a:prstDash val="solid"/>
+                      <a:round/>
+                      <a:headEnd type="none" w="med" len="med"/>
+                      <a:tailEnd type="none" w="med" len="med"/>
+                    </a:lnR>
+                    <a:lnT w="3175" cap="flat" cmpd="sng" algn="ctr">
+                      <a:solidFill>
+                        <a:schemeClr val="tx1"/>
+                      </a:solidFill>
+                      <a:prstDash val="solid"/>
+                      <a:round/>
+                      <a:headEnd type="none" w="med" len="med"/>
+                      <a:tailEnd type="none" w="med" len="med"/>
+                    </a:lnT>
+                    <a:lnB w="19050" cap="flat" cmpd="sng" algn="ctr">
+                      <a:solidFill>
+                        <a:schemeClr val="tx1"/>
+                      </a:solidFill>
+                      <a:prstDash val="solid"/>
+                      <a:round/>
+                      <a:headEnd type="none" w="med" len="med"/>
+                      <a:tailEnd type="none" w="med" len="med"/>
+                    </a:lnB>
+                    <a:noFill/>
+                  </a:tcPr>
+                </a:tc>
+                <a:tc>
+                  <a:txBody>
+                    <a:bodyPr/>
+                    <a:lstStyle/>
+                    <a:p>
+                      <a:pPr>
+                        <a:buNone/>
+                      </a:pPr>
+                      <a:r>
+                        <a:rPr lang="ko-KR" altLang="en-US" dirty="0"/>
+                        <a:t>불가능 </a:t>
+                      </a:r>
+                      <a:r>
+                        <a:rPr lang="en-US" altLang="ko-KR" dirty="0"/>
+                        <a:t>(</a:t>
+                      </a:r>
+                      <a:r>
+                        <a:rPr lang="ko-KR" altLang="en-US" dirty="0"/>
+                        <a:t>항상 새 요청</a:t>
+                      </a:r>
+                      <a:r>
+                        <a:rPr lang="en-US" altLang="ko-KR" dirty="0"/>
+                        <a:t>)</a:t>
+                      </a:r>
+                    </a:p>
+                  </a:txBody>
+                  <a:tcPr>
+                    <a:lnL w="3175" cap="flat" cmpd="sng" algn="ctr">
+                      <a:solidFill>
+                        <a:schemeClr val="tx1"/>
+                      </a:solidFill>
+                      <a:prstDash val="solid"/>
+                      <a:round/>
+                      <a:headEnd type="none" w="med" len="med"/>
+                      <a:tailEnd type="none" w="med" len="med"/>
+                    </a:lnL>
+                    <a:lnR>
+                      <a:noFill/>
+                    </a:lnR>
+                    <a:lnT w="3175" cap="flat" cmpd="sng" algn="ctr">
+                      <a:solidFill>
+                        <a:schemeClr val="tx1"/>
+                      </a:solidFill>
+                      <a:prstDash val="solid"/>
+                      <a:round/>
+                      <a:headEnd type="none" w="med" len="med"/>
+                      <a:tailEnd type="none" w="med" len="med"/>
+                    </a:lnT>
+                    <a:lnB w="19050" cap="flat" cmpd="sng" algn="ctr">
+                      <a:solidFill>
+                        <a:schemeClr val="tx1"/>
+                      </a:solidFill>
+                      <a:prstDash val="solid"/>
+                      <a:round/>
+                      <a:headEnd type="none" w="med" len="med"/>
+                      <a:tailEnd type="none" w="med" len="med"/>
+                    </a:lnB>
+                    <a:noFill/>
+                  </a:tcPr>
+                </a:tc>
+                <a:extLst>
+                  <a:ext uri="{0D108BD9-81ED-4DB2-BD59-A6C34878D82A}">
+                    <a16:rowId xmlns:a16="http://schemas.microsoft.com/office/drawing/2014/main" val="2783075661"/>
+                  </a:ext>
+                </a:extLst>
+              </a:tr>
+            </a:tbl>
+          </a:graphicData>
+        </a:graphic>
+      </p:graphicFrame>
+    </p:spTree>
+    <p:extLst>
+      <p:ext uri="{BB962C8B-B14F-4D97-AF65-F5344CB8AC3E}">
+        <p14:creationId xmlns:p14="http://schemas.microsoft.com/office/powerpoint/2010/main" val="3412006194"/>
+      </p:ext>
+    </p:extLst>
+  </p:cSld>
+  <p:clrMapOvr>
+    <a:masterClrMapping/>
+  </p:clrMapOvr>
+</p:sld>
+</file>
+
+<file path=ppt/slides/slide7.xml><?xml version="1.0" encoding="utf-8"?>
+<p:sld xmlns:a="http://schemas.openxmlformats.org/drawingml/2006/main" xmlns:r="http://schemas.openxmlformats.org/officeDocument/2006/relationships" xmlns:p="http://schemas.openxmlformats.org/presentationml/2006/main">
+  <p:cSld>
+    <p:spTree>
+      <p:nvGrpSpPr>
         <p:cNvPr id="1" name=""/>
         <p:cNvGrpSpPr/>
         <p:nvPr/>
@@ -22725,7 +25877,7 @@
 </p:sld>
 </file>
 
-<file path=ppt/slides/slide7.xml><?xml version="1.0" encoding="utf-8"?>
+<file path=ppt/slides/slide8.xml><?xml version="1.0" encoding="utf-8"?>
 <p:sld xmlns:a="http://schemas.openxmlformats.org/drawingml/2006/main" xmlns:r="http://schemas.openxmlformats.org/officeDocument/2006/relationships" xmlns:p="http://schemas.openxmlformats.org/presentationml/2006/main">
   <p:cSld>
     <p:spTree>
@@ -25724,7 +28876,7 @@
 </p:sld>
 </file>
 
-<file path=ppt/slides/slide8.xml><?xml version="1.0" encoding="utf-8"?>
+<file path=ppt/slides/slide9.xml><?xml version="1.0" encoding="utf-8"?>
 <p:sld xmlns:a="http://schemas.openxmlformats.org/drawingml/2006/main" xmlns:r="http://schemas.openxmlformats.org/officeDocument/2006/relationships" xmlns:p="http://schemas.openxmlformats.org/presentationml/2006/main">
   <p:cSld>
     <p:spTree>
@@ -29220,1318 +32372,6 @@
     <p:extLst>
       <p:ext uri="{BB962C8B-B14F-4D97-AF65-F5344CB8AC3E}">
         <p14:creationId xmlns:p14="http://schemas.microsoft.com/office/powerpoint/2010/main" val="3287658431"/>
-      </p:ext>
-    </p:extLst>
-  </p:cSld>
-  <p:clrMapOvr>
-    <a:masterClrMapping/>
-  </p:clrMapOvr>
-</p:sld>
-</file>
-
-<file path=ppt/slides/slide9.xml><?xml version="1.0" encoding="utf-8"?>
-<p:sld xmlns:a="http://schemas.openxmlformats.org/drawingml/2006/main" xmlns:r="http://schemas.openxmlformats.org/officeDocument/2006/relationships" xmlns:p="http://schemas.openxmlformats.org/presentationml/2006/main">
-  <p:cSld>
-    <p:spTree>
-      <p:nvGrpSpPr>
-        <p:cNvPr id="1" name=""/>
-        <p:cNvGrpSpPr/>
-        <p:nvPr/>
-      </p:nvGrpSpPr>
-      <p:grpSpPr>
-        <a:xfrm>
-          <a:off x="0" y="0"/>
-          <a:ext cx="0" cy="0"/>
-          <a:chOff x="0" y="0"/>
-          <a:chExt cx="0" cy="0"/>
-        </a:xfrm>
-      </p:grpSpPr>
-      <p:pic>
-        <p:nvPicPr>
-          <p:cNvPr id="6146" name="Picture 2" descr="Teamwork, Cooperation, Brainstorming, Business, Finance">
-            <a:extLst>
-              <a:ext uri="{FF2B5EF4-FFF2-40B4-BE49-F238E27FC236}">
-                <a16:creationId xmlns:a16="http://schemas.microsoft.com/office/drawing/2014/main" id="{00034215-976A-55E1-896C-B3C32FD19D61}"/>
-              </a:ext>
-            </a:extLst>
-          </p:cNvPr>
-          <p:cNvPicPr>
-            <a:picLocks noChangeAspect="1" noChangeArrowheads="1"/>
-          </p:cNvPicPr>
-          <p:nvPr/>
-        </p:nvPicPr>
-        <p:blipFill>
-          <a:blip r:embed="rId2">
-            <a:extLst>
-              <a:ext uri="{28A0092B-C50C-407E-A947-70E740481C1C}">
-                <a14:useLocalDpi xmlns:a14="http://schemas.microsoft.com/office/drawing/2010/main" val="0"/>
-              </a:ext>
-            </a:extLst>
-          </a:blip>
-          <a:srcRect/>
-          <a:stretch>
-            <a:fillRect/>
-          </a:stretch>
-        </p:blipFill>
-        <p:spPr bwMode="auto">
-          <a:xfrm>
-            <a:off x="562149" y="3182632"/>
-            <a:ext cx="5274788" cy="3324219"/>
-          </a:xfrm>
-          <a:prstGeom prst="rect">
-            <a:avLst/>
-          </a:prstGeom>
-          <a:noFill/>
-          <a:effectLst>
-            <a:outerShdw blurRad="101600" dist="50800" dir="2700000" sx="99000" sy="99000" algn="tl" rotWithShape="0">
-              <a:prstClr val="black">
-                <a:alpha val="40000"/>
-              </a:prstClr>
-            </a:outerShdw>
-          </a:effectLst>
-          <a:extLst>
-            <a:ext uri="{909E8E84-426E-40DD-AFC4-6F175D3DCCD1}">
-              <a14:hiddenFill xmlns:a14="http://schemas.microsoft.com/office/drawing/2010/main">
-                <a:solidFill>
-                  <a:srgbClr val="FFFFFF"/>
-                </a:solidFill>
-              </a14:hiddenFill>
-            </a:ext>
-          </a:extLst>
-        </p:spPr>
-      </p:pic>
-      <p:pic>
-        <p:nvPicPr>
-          <p:cNvPr id="6148" name="Picture 4" descr="Business, Businessman, Chair, Computer, Desk, Desktop">
-            <a:extLst>
-              <a:ext uri="{FF2B5EF4-FFF2-40B4-BE49-F238E27FC236}">
-                <a16:creationId xmlns:a16="http://schemas.microsoft.com/office/drawing/2014/main" id="{523E9D91-FAEF-45D9-827C-6275862FDD07}"/>
-              </a:ext>
-            </a:extLst>
-          </p:cNvPr>
-          <p:cNvPicPr>
-            <a:picLocks noChangeAspect="1" noChangeArrowheads="1"/>
-          </p:cNvPicPr>
-          <p:nvPr/>
-        </p:nvPicPr>
-        <p:blipFill rotWithShape="1">
-          <a:blip r:embed="rId3">
-            <a:extLst>
-              <a:ext uri="{28A0092B-C50C-407E-A947-70E740481C1C}">
-                <a14:useLocalDpi xmlns:a14="http://schemas.microsoft.com/office/drawing/2010/main" val="0"/>
-              </a:ext>
-            </a:extLst>
-          </a:blip>
-          <a:srcRect b="5764"/>
-          <a:stretch/>
-        </p:blipFill>
-        <p:spPr bwMode="auto">
-          <a:xfrm>
-            <a:off x="6355064" y="3182632"/>
-            <a:ext cx="5274788" cy="3324219"/>
-          </a:xfrm>
-          <a:prstGeom prst="rect">
-            <a:avLst/>
-          </a:prstGeom>
-          <a:noFill/>
-          <a:effectLst>
-            <a:outerShdw blurRad="101600" dist="50800" dir="2700000" sx="99000" sy="99000" algn="tl" rotWithShape="0">
-              <a:prstClr val="black">
-                <a:alpha val="40000"/>
-              </a:prstClr>
-            </a:outerShdw>
-          </a:effectLst>
-          <a:extLst>
-            <a:ext uri="{909E8E84-426E-40DD-AFC4-6F175D3DCCD1}">
-              <a14:hiddenFill xmlns:a14="http://schemas.microsoft.com/office/drawing/2010/main">
-                <a:solidFill>
-                  <a:srgbClr val="FFFFFF"/>
-                </a:solidFill>
-              </a14:hiddenFill>
-            </a:ext>
-          </a:extLst>
-        </p:spPr>
-      </p:pic>
-      <p:pic>
-        <p:nvPicPr>
-          <p:cNvPr id="1026" name="Picture 2" descr="worm's-eye-view of white concrete building">
-            <a:extLst>
-              <a:ext uri="{FF2B5EF4-FFF2-40B4-BE49-F238E27FC236}">
-                <a16:creationId xmlns:a16="http://schemas.microsoft.com/office/drawing/2014/main" id="{E3632ECD-7293-6940-71FC-241A304951B1}"/>
-              </a:ext>
-            </a:extLst>
-          </p:cNvPr>
-          <p:cNvPicPr>
-            <a:picLocks noChangeAspect="1" noChangeArrowheads="1"/>
-          </p:cNvPicPr>
-          <p:nvPr/>
-        </p:nvPicPr>
-        <p:blipFill rotWithShape="1">
-          <a:blip r:embed="rId4">
-            <a:extLst>
-              <a:ext uri="{28A0092B-C50C-407E-A947-70E740481C1C}">
-                <a14:useLocalDpi xmlns:a14="http://schemas.microsoft.com/office/drawing/2010/main" val="0"/>
-              </a:ext>
-            </a:extLst>
-          </a:blip>
-          <a:srcRect t="7997" b="80289"/>
-          <a:stretch/>
-        </p:blipFill>
-        <p:spPr bwMode="auto">
-          <a:xfrm>
-            <a:off x="-14514" y="0"/>
-            <a:ext cx="12221028" cy="956312"/>
-          </a:xfrm>
-          <a:prstGeom prst="rect">
-            <a:avLst/>
-          </a:prstGeom>
-          <a:noFill/>
-          <a:extLst>
-            <a:ext uri="{909E8E84-426E-40DD-AFC4-6F175D3DCCD1}">
-              <a14:hiddenFill xmlns:a14="http://schemas.microsoft.com/office/drawing/2010/main">
-                <a:solidFill>
-                  <a:srgbClr val="FFFFFF"/>
-                </a:solidFill>
-              </a14:hiddenFill>
-            </a:ext>
-          </a:extLst>
-        </p:spPr>
-      </p:pic>
-      <p:sp>
-        <p:nvSpPr>
-          <p:cNvPr id="4" name="직사각형 3">
-            <a:extLst>
-              <a:ext uri="{FF2B5EF4-FFF2-40B4-BE49-F238E27FC236}">
-                <a16:creationId xmlns:a16="http://schemas.microsoft.com/office/drawing/2014/main" id="{CB755CBA-C1EC-28CF-BB20-3545AE99B592}"/>
-              </a:ext>
-            </a:extLst>
-          </p:cNvPr>
-          <p:cNvSpPr/>
-          <p:nvPr/>
-        </p:nvSpPr>
-        <p:spPr>
-          <a:xfrm>
-            <a:off x="-14513" y="0"/>
-            <a:ext cx="12221028" cy="956312"/>
-          </a:xfrm>
-          <a:prstGeom prst="rect">
-            <a:avLst/>
-          </a:prstGeom>
-          <a:solidFill>
-            <a:srgbClr val="09293E">
-              <a:alpha val="85000"/>
-            </a:srgbClr>
-          </a:solidFill>
-          <a:ln>
-            <a:noFill/>
-          </a:ln>
-        </p:spPr>
-        <p:style>
-          <a:lnRef idx="2">
-            <a:schemeClr val="accent1">
-              <a:shade val="50000"/>
-            </a:schemeClr>
-          </a:lnRef>
-          <a:fillRef idx="1">
-            <a:schemeClr val="accent1"/>
-          </a:fillRef>
-          <a:effectRef idx="0">
-            <a:schemeClr val="accent1"/>
-          </a:effectRef>
-          <a:fontRef idx="minor">
-            <a:schemeClr val="lt1"/>
-          </a:fontRef>
-        </p:style>
-        <p:txBody>
-          <a:bodyPr rtlCol="0" anchor="ctr"/>
-          <a:lstStyle/>
-          <a:p>
-            <a:pPr algn="ctr"/>
-            <a:endParaRPr lang="ko-KR" altLang="en-US">
-              <a:ln>
-                <a:solidFill>
-                  <a:schemeClr val="accent1">
-                    <a:alpha val="0"/>
-                  </a:schemeClr>
-                </a:solidFill>
-              </a:ln>
-            </a:endParaRPr>
-          </a:p>
-        </p:txBody>
-      </p:sp>
-      <p:sp>
-        <p:nvSpPr>
-          <p:cNvPr id="25" name="TextBox 24">
-            <a:extLst>
-              <a:ext uri="{FF2B5EF4-FFF2-40B4-BE49-F238E27FC236}">
-                <a16:creationId xmlns:a16="http://schemas.microsoft.com/office/drawing/2014/main" id="{E5B44510-0956-0581-AF3F-6E8541293E59}"/>
-              </a:ext>
-            </a:extLst>
-          </p:cNvPr>
-          <p:cNvSpPr txBox="1"/>
-          <p:nvPr/>
-        </p:nvSpPr>
-        <p:spPr>
-          <a:xfrm>
-            <a:off x="285522" y="-29676"/>
-            <a:ext cx="486954" cy="923330"/>
-          </a:xfrm>
-          <a:prstGeom prst="rect">
-            <a:avLst/>
-          </a:prstGeom>
-          <a:noFill/>
-        </p:spPr>
-        <p:txBody>
-          <a:bodyPr wrap="square" rtlCol="0">
-            <a:spAutoFit/>
-          </a:bodyPr>
-          <a:lstStyle/>
-          <a:p>
-            <a:pPr algn="ctr"/>
-            <a:r>
-              <a:rPr lang="en-US" altLang="ko-KR" sz="5400" dirty="0">
-                <a:ln>
-                  <a:solidFill>
-                    <a:schemeClr val="accent1">
-                      <a:alpha val="0"/>
-                    </a:schemeClr>
-                  </a:solidFill>
-                </a:ln>
-                <a:solidFill>
-                  <a:srgbClr val="FFFFFF"/>
-                </a:solidFill>
-                <a:latin typeface="바탕" panose="02030600000101010101" pitchFamily="18" charset="-127"/>
-                <a:ea typeface="바탕" panose="02030600000101010101" pitchFamily="18" charset="-127"/>
-              </a:rPr>
-              <a:t>Ⅱ</a:t>
-            </a:r>
-            <a:endParaRPr lang="ko-KR" altLang="en-US" sz="5400" dirty="0">
-              <a:ln>
-                <a:solidFill>
-                  <a:schemeClr val="accent1">
-                    <a:alpha val="0"/>
-                  </a:schemeClr>
-                </a:solidFill>
-              </a:ln>
-              <a:solidFill>
-                <a:srgbClr val="FFFFFF"/>
-              </a:solidFill>
-              <a:latin typeface="바탕" panose="02030600000101010101" pitchFamily="18" charset="-127"/>
-              <a:ea typeface="바탕" panose="02030600000101010101" pitchFamily="18" charset="-127"/>
-            </a:endParaRPr>
-          </a:p>
-        </p:txBody>
-      </p:sp>
-      <p:grpSp>
-        <p:nvGrpSpPr>
-          <p:cNvPr id="13" name="그룹 12">
-            <a:extLst>
-              <a:ext uri="{FF2B5EF4-FFF2-40B4-BE49-F238E27FC236}">
-                <a16:creationId xmlns:a16="http://schemas.microsoft.com/office/drawing/2014/main" id="{A80A8171-CB0C-2F7A-794C-3811493A5585}"/>
-              </a:ext>
-            </a:extLst>
-          </p:cNvPr>
-          <p:cNvGrpSpPr/>
-          <p:nvPr/>
-        </p:nvGrpSpPr>
-        <p:grpSpPr>
-          <a:xfrm>
-            <a:off x="875584" y="185768"/>
-            <a:ext cx="6908802" cy="627046"/>
-            <a:chOff x="772475" y="185768"/>
-            <a:chExt cx="6908802" cy="627046"/>
-          </a:xfrm>
-        </p:grpSpPr>
-        <p:sp>
-          <p:nvSpPr>
-            <p:cNvPr id="14" name="TextBox 13">
-              <a:extLst>
-                <a:ext uri="{FF2B5EF4-FFF2-40B4-BE49-F238E27FC236}">
-                  <a16:creationId xmlns:a16="http://schemas.microsoft.com/office/drawing/2014/main" id="{47C2D5F5-F857-10CD-2E55-32B5B7A4A37F}"/>
-                </a:ext>
-              </a:extLst>
-            </p:cNvPr>
-            <p:cNvSpPr txBox="1"/>
-            <p:nvPr/>
-          </p:nvSpPr>
-          <p:spPr>
-            <a:xfrm>
-              <a:off x="772477" y="351149"/>
-              <a:ext cx="6908800" cy="461665"/>
-            </a:xfrm>
-            <a:prstGeom prst="rect">
-              <a:avLst/>
-            </a:prstGeom>
-            <a:noFill/>
-          </p:spPr>
-          <p:txBody>
-            <a:bodyPr wrap="square" rtlCol="0">
-              <a:spAutoFit/>
-            </a:bodyPr>
-            <a:lstStyle/>
-            <a:p>
-              <a:r>
-                <a:rPr lang="ko-KR" altLang="en-US" sz="2400" dirty="0" err="1">
-                  <a:ln>
-                    <a:solidFill>
-                      <a:schemeClr val="accent1">
-                        <a:alpha val="0"/>
-                      </a:schemeClr>
-                    </a:solidFill>
-                  </a:ln>
-                  <a:solidFill>
-                    <a:srgbClr val="09E8FF"/>
-                  </a:solidFill>
-                  <a:latin typeface="나눔스퀘어_ac ExtraBold" panose="020B0600000101010101" pitchFamily="50" charset="-127"/>
-                  <a:ea typeface="나눔스퀘어_ac ExtraBold" panose="020B0600000101010101" pitchFamily="50" charset="-127"/>
-                </a:rPr>
-                <a:t>나이스한</a:t>
-              </a:r>
-              <a:r>
-                <a:rPr lang="ko-KR" altLang="en-US" sz="2400" dirty="0">
-                  <a:ln>
-                    <a:solidFill>
-                      <a:schemeClr val="accent1">
-                        <a:alpha val="0"/>
-                      </a:schemeClr>
-                    </a:solidFill>
-                  </a:ln>
-                  <a:solidFill>
-                    <a:srgbClr val="09E8FF"/>
-                  </a:solidFill>
-                  <a:latin typeface="나눔스퀘어_ac ExtraBold" panose="020B0600000101010101" pitchFamily="50" charset="-127"/>
-                  <a:ea typeface="나눔스퀘어_ac ExtraBold" panose="020B0600000101010101" pitchFamily="50" charset="-127"/>
-                </a:rPr>
-                <a:t> 슬라이드의 제목</a:t>
-              </a:r>
-              <a:r>
-                <a:rPr lang="ko-KR" altLang="en-US" sz="2400" dirty="0">
-                  <a:ln>
-                    <a:solidFill>
-                      <a:schemeClr val="accent1">
-                        <a:alpha val="0"/>
-                      </a:schemeClr>
-                    </a:solidFill>
-                  </a:ln>
-                  <a:solidFill>
-                    <a:schemeClr val="bg1"/>
-                  </a:solidFill>
-                  <a:latin typeface="나눔스퀘어_ac ExtraBold" panose="020B0600000101010101" pitchFamily="50" charset="-127"/>
-                  <a:ea typeface="나눔스퀘어_ac ExtraBold" panose="020B0600000101010101" pitchFamily="50" charset="-127"/>
-                </a:rPr>
-                <a:t>을 입력해주세요</a:t>
-              </a:r>
-            </a:p>
-          </p:txBody>
-        </p:sp>
-        <p:sp>
-          <p:nvSpPr>
-            <p:cNvPr id="15" name="TextBox 14">
-              <a:extLst>
-                <a:ext uri="{FF2B5EF4-FFF2-40B4-BE49-F238E27FC236}">
-                  <a16:creationId xmlns:a16="http://schemas.microsoft.com/office/drawing/2014/main" id="{17FD18EB-CCFF-ECE5-0F2C-BB16E3DB5534}"/>
-                </a:ext>
-              </a:extLst>
-            </p:cNvPr>
-            <p:cNvSpPr txBox="1"/>
-            <p:nvPr/>
-          </p:nvSpPr>
-          <p:spPr>
-            <a:xfrm>
-              <a:off x="772475" y="185768"/>
-              <a:ext cx="1492093" cy="246221"/>
-            </a:xfrm>
-            <a:prstGeom prst="rect">
-              <a:avLst/>
-            </a:prstGeom>
-            <a:noFill/>
-          </p:spPr>
-          <p:txBody>
-            <a:bodyPr wrap="square" rtlCol="0">
-              <a:spAutoFit/>
-            </a:bodyPr>
-            <a:lstStyle/>
-            <a:p>
-              <a:r>
-                <a:rPr lang="ko-KR" altLang="en-US" sz="1000" dirty="0">
-                  <a:ln>
-                    <a:solidFill>
-                      <a:schemeClr val="accent1">
-                        <a:alpha val="0"/>
-                      </a:schemeClr>
-                    </a:solidFill>
-                  </a:ln>
-                  <a:solidFill>
-                    <a:srgbClr val="FFFFFF"/>
-                  </a:solidFill>
-                  <a:latin typeface="나눔스퀘어_ac Bold" panose="020B0600000101010101" pitchFamily="50" charset="-127"/>
-                  <a:ea typeface="나눔스퀘어_ac Bold" panose="020B0600000101010101" pitchFamily="50" charset="-127"/>
-                </a:rPr>
-                <a:t>소제목입력 </a:t>
-              </a:r>
-              <a:r>
-                <a:rPr lang="ko-KR" altLang="en-US" sz="1000" dirty="0" err="1">
-                  <a:ln>
-                    <a:solidFill>
-                      <a:schemeClr val="accent1">
-                        <a:alpha val="0"/>
-                      </a:schemeClr>
-                    </a:solidFill>
-                  </a:ln>
-                  <a:solidFill>
-                    <a:srgbClr val="FFFFFF"/>
-                  </a:solidFill>
-                  <a:latin typeface="나눔스퀘어_ac Bold" panose="020B0600000101010101" pitchFamily="50" charset="-127"/>
-                  <a:ea typeface="나눔스퀘어_ac Bold" panose="020B0600000101010101" pitchFamily="50" charset="-127"/>
-                </a:rPr>
-                <a:t>레쓰고</a:t>
-              </a:r>
-              <a:endParaRPr lang="ko-KR" altLang="en-US" sz="1000" dirty="0">
-                <a:ln>
-                  <a:solidFill>
-                    <a:schemeClr val="accent1">
-                      <a:alpha val="0"/>
-                    </a:schemeClr>
-                  </a:solidFill>
-                </a:ln>
-                <a:solidFill>
-                  <a:srgbClr val="FFFFFF"/>
-                </a:solidFill>
-                <a:latin typeface="나눔스퀘어_ac Bold" panose="020B0600000101010101" pitchFamily="50" charset="-127"/>
-                <a:ea typeface="나눔스퀘어_ac Bold" panose="020B0600000101010101" pitchFamily="50" charset="-127"/>
-              </a:endParaRPr>
-            </a:p>
-          </p:txBody>
-        </p:sp>
-      </p:grpSp>
-      <p:sp>
-        <p:nvSpPr>
-          <p:cNvPr id="16" name="TextBox 15">
-            <a:extLst>
-              <a:ext uri="{FF2B5EF4-FFF2-40B4-BE49-F238E27FC236}">
-                <a16:creationId xmlns:a16="http://schemas.microsoft.com/office/drawing/2014/main" id="{8A3A96FF-531F-CE67-6480-1801038DA9D4}"/>
-              </a:ext>
-            </a:extLst>
-          </p:cNvPr>
-          <p:cNvSpPr txBox="1"/>
-          <p:nvPr/>
-        </p:nvSpPr>
-        <p:spPr>
-          <a:xfrm>
-            <a:off x="7324627" y="551204"/>
-            <a:ext cx="4581851" cy="261610"/>
-          </a:xfrm>
-          <a:prstGeom prst="rect">
-            <a:avLst/>
-          </a:prstGeom>
-          <a:noFill/>
-        </p:spPr>
-        <p:txBody>
-          <a:bodyPr wrap="square" rtlCol="0">
-            <a:spAutoFit/>
-          </a:bodyPr>
-          <a:lstStyle/>
-          <a:p>
-            <a:pPr algn="r"/>
-            <a:r>
-              <a:rPr lang="en-US" altLang="ko-KR" sz="1100" dirty="0" err="1">
-                <a:ln>
-                  <a:solidFill>
-                    <a:schemeClr val="accent1">
-                      <a:alpha val="0"/>
-                    </a:schemeClr>
-                  </a:solidFill>
-                </a:ln>
-                <a:solidFill>
-                  <a:srgbClr val="FFFFFF"/>
-                </a:solidFill>
-                <a:latin typeface="나눔스퀘어_ac Bold" panose="020B0600000101010101" pitchFamily="50" charset="-127"/>
-                <a:ea typeface="나눔스퀘어_ac Bold" panose="020B0600000101010101" pitchFamily="50" charset="-127"/>
-              </a:rPr>
-              <a:t>Coporation</a:t>
-            </a:r>
-            <a:r>
-              <a:rPr lang="en-US" altLang="ko-KR" sz="1100" dirty="0">
-                <a:ln>
-                  <a:solidFill>
-                    <a:schemeClr val="accent1">
-                      <a:alpha val="0"/>
-                    </a:schemeClr>
-                  </a:solidFill>
-                </a:ln>
-                <a:solidFill>
-                  <a:srgbClr val="FFFFFF"/>
-                </a:solidFill>
-                <a:latin typeface="나눔스퀘어_ac Bold" panose="020B0600000101010101" pitchFamily="50" charset="-127"/>
-                <a:ea typeface="나눔스퀘어_ac Bold" panose="020B0600000101010101" pitchFamily="50" charset="-127"/>
-              </a:rPr>
-              <a:t> Of PPT Hunter Template Legend</a:t>
-            </a:r>
-            <a:endParaRPr lang="ko-KR" altLang="en-US" sz="1100" dirty="0">
-              <a:ln>
-                <a:solidFill>
-                  <a:schemeClr val="accent1">
-                    <a:alpha val="0"/>
-                  </a:schemeClr>
-                </a:solidFill>
-              </a:ln>
-              <a:solidFill>
-                <a:srgbClr val="FFFFFF"/>
-              </a:solidFill>
-              <a:latin typeface="나눔스퀘어_ac Bold" panose="020B0600000101010101" pitchFamily="50" charset="-127"/>
-              <a:ea typeface="나눔스퀘어_ac Bold" panose="020B0600000101010101" pitchFamily="50" charset="-127"/>
-            </a:endParaRPr>
-          </a:p>
-        </p:txBody>
-      </p:sp>
-      <p:sp>
-        <p:nvSpPr>
-          <p:cNvPr id="17" name="TextBox 16">
-            <a:extLst>
-              <a:ext uri="{FF2B5EF4-FFF2-40B4-BE49-F238E27FC236}">
-                <a16:creationId xmlns:a16="http://schemas.microsoft.com/office/drawing/2014/main" id="{7E5D837A-A56D-4AD8-86C6-E602A2DC7100}"/>
-              </a:ext>
-            </a:extLst>
-          </p:cNvPr>
-          <p:cNvSpPr txBox="1"/>
-          <p:nvPr/>
-        </p:nvSpPr>
-        <p:spPr>
-          <a:xfrm>
-            <a:off x="409575" y="1287747"/>
-            <a:ext cx="3238500" cy="338554"/>
-          </a:xfrm>
-          <a:prstGeom prst="rect">
-            <a:avLst/>
-          </a:prstGeom>
-          <a:noFill/>
-        </p:spPr>
-        <p:txBody>
-          <a:bodyPr wrap="square" rtlCol="0">
-            <a:spAutoFit/>
-          </a:bodyPr>
-          <a:lstStyle>
-            <a:defPPr>
-              <a:defRPr lang="ko-KR"/>
-            </a:defPPr>
-            <a:lvl1pPr>
-              <a:defRPr sz="1600">
-                <a:ln>
-                  <a:solidFill>
-                    <a:schemeClr val="accent1">
-                      <a:alpha val="0"/>
-                    </a:schemeClr>
-                  </a:solidFill>
-                </a:ln>
-                <a:solidFill>
-                  <a:srgbClr val="0A2539"/>
-                </a:solidFill>
-                <a:latin typeface="나눔스퀘어_ac ExtraBold" panose="020B0600000101010101" pitchFamily="50" charset="-127"/>
-                <a:ea typeface="나눔스퀘어_ac ExtraBold" panose="020B0600000101010101" pitchFamily="50" charset="-127"/>
-              </a:defRPr>
-            </a:lvl1pPr>
-          </a:lstStyle>
-          <a:p>
-            <a:r>
-              <a:rPr lang="en-US" altLang="ko-KR" dirty="0">
-                <a:solidFill>
-                  <a:srgbClr val="0D2C3F"/>
-                </a:solidFill>
-              </a:rPr>
-              <a:t>1) </a:t>
-            </a:r>
-            <a:r>
-              <a:rPr lang="ko-KR" altLang="en-US" dirty="0">
-                <a:solidFill>
-                  <a:srgbClr val="0D2C3F"/>
-                </a:solidFill>
-              </a:rPr>
-              <a:t>소제목을 입력해주시기 바랍니다</a:t>
-            </a:r>
-          </a:p>
-        </p:txBody>
-      </p:sp>
-      <p:sp>
-        <p:nvSpPr>
-          <p:cNvPr id="18" name="TextBox 17">
-            <a:extLst>
-              <a:ext uri="{FF2B5EF4-FFF2-40B4-BE49-F238E27FC236}">
-                <a16:creationId xmlns:a16="http://schemas.microsoft.com/office/drawing/2014/main" id="{50D4EB8D-F164-F580-C49D-502558F1242E}"/>
-              </a:ext>
-            </a:extLst>
-          </p:cNvPr>
-          <p:cNvSpPr txBox="1"/>
-          <p:nvPr/>
-        </p:nvSpPr>
-        <p:spPr>
-          <a:xfrm>
-            <a:off x="875584" y="1647062"/>
-            <a:ext cx="10896175" cy="1353897"/>
-          </a:xfrm>
-          <a:prstGeom prst="rect">
-            <a:avLst/>
-          </a:prstGeom>
-          <a:noFill/>
-        </p:spPr>
-        <p:txBody>
-          <a:bodyPr wrap="square" rtlCol="0">
-            <a:spAutoFit/>
-          </a:bodyPr>
-          <a:lstStyle/>
-          <a:p>
-            <a:pPr>
-              <a:lnSpc>
-                <a:spcPct val="150000"/>
-              </a:lnSpc>
-            </a:pPr>
-            <a:r>
-              <a:rPr lang="ko-KR" altLang="en-US" sz="1400" dirty="0">
-                <a:ln>
-                  <a:solidFill>
-                    <a:schemeClr val="accent1">
-                      <a:alpha val="0"/>
-                    </a:schemeClr>
-                  </a:solidFill>
-                </a:ln>
-                <a:latin typeface="나눔스퀘어_ac" panose="020B0600000101010101" pitchFamily="50" charset="-127"/>
-                <a:ea typeface="나눔스퀘어_ac" panose="020B0600000101010101" pitchFamily="50" charset="-127"/>
-              </a:rPr>
-              <a:t>사실 진짜 </a:t>
-            </a:r>
-            <a:r>
-              <a:rPr lang="ko-KR" altLang="en-US" sz="1400" dirty="0" err="1">
-                <a:ln>
-                  <a:solidFill>
-                    <a:schemeClr val="accent1">
-                      <a:alpha val="0"/>
-                    </a:schemeClr>
-                  </a:solidFill>
-                </a:ln>
-                <a:latin typeface="나눔스퀘어_ac" panose="020B0600000101010101" pitchFamily="50" charset="-127"/>
-                <a:ea typeface="나눔스퀘어_ac" panose="020B0600000101010101" pitchFamily="50" charset="-127"/>
-              </a:rPr>
-              <a:t>쓸말</a:t>
-            </a:r>
-            <a:r>
-              <a:rPr lang="ko-KR" altLang="en-US" sz="1400" dirty="0">
-                <a:ln>
-                  <a:solidFill>
-                    <a:schemeClr val="accent1">
-                      <a:alpha val="0"/>
-                    </a:schemeClr>
-                  </a:solidFill>
-                </a:ln>
-                <a:latin typeface="나눔스퀘어_ac" panose="020B0600000101010101" pitchFamily="50" charset="-127"/>
-                <a:ea typeface="나눔스퀘어_ac" panose="020B0600000101010101" pitchFamily="50" charset="-127"/>
-              </a:rPr>
-              <a:t> 없는데 나는 원래 </a:t>
-            </a:r>
-            <a:r>
-              <a:rPr lang="ko-KR" altLang="en-US" sz="1400" dirty="0" err="1">
-                <a:ln>
-                  <a:solidFill>
-                    <a:schemeClr val="accent1">
-                      <a:alpha val="0"/>
-                    </a:schemeClr>
-                  </a:solidFill>
-                </a:ln>
-                <a:latin typeface="나눔스퀘어_ac" panose="020B0600000101010101" pitchFamily="50" charset="-127"/>
-                <a:ea typeface="나눔스퀘어_ac" panose="020B0600000101010101" pitchFamily="50" charset="-127"/>
-              </a:rPr>
-              <a:t>짧게짧게</a:t>
-            </a:r>
-            <a:r>
-              <a:rPr lang="ko-KR" altLang="en-US" sz="1400" dirty="0">
-                <a:ln>
-                  <a:solidFill>
-                    <a:schemeClr val="accent1">
-                      <a:alpha val="0"/>
-                    </a:schemeClr>
-                  </a:solidFill>
-                </a:ln>
-                <a:latin typeface="나눔스퀘어_ac" panose="020B0600000101010101" pitchFamily="50" charset="-127"/>
-                <a:ea typeface="나눔스퀘어_ac" panose="020B0600000101010101" pitchFamily="50" charset="-127"/>
-              </a:rPr>
-              <a:t> 조지는 스타일인데</a:t>
-            </a:r>
-            <a:r>
-              <a:rPr lang="en-US" altLang="ko-KR" sz="1400" dirty="0">
-                <a:ln>
-                  <a:solidFill>
-                    <a:schemeClr val="accent1">
-                      <a:alpha val="0"/>
-                    </a:schemeClr>
-                  </a:solidFill>
-                </a:ln>
-                <a:latin typeface="나눔스퀘어_ac" panose="020B0600000101010101" pitchFamily="50" charset="-127"/>
-                <a:ea typeface="나눔스퀘어_ac" panose="020B0600000101010101" pitchFamily="50" charset="-127"/>
-              </a:rPr>
-              <a:t>, </a:t>
-            </a:r>
-            <a:r>
-              <a:rPr lang="ko-KR" altLang="en-US" sz="1400" dirty="0">
-                <a:ln>
-                  <a:solidFill>
-                    <a:schemeClr val="accent1">
-                      <a:alpha val="0"/>
-                    </a:schemeClr>
-                  </a:solidFill>
-                </a:ln>
-                <a:latin typeface="나눔스퀘어_ac" panose="020B0600000101010101" pitchFamily="50" charset="-127"/>
-                <a:ea typeface="나눔스퀘어_ac" panose="020B0600000101010101" pitchFamily="50" charset="-127"/>
-              </a:rPr>
-              <a:t>이 </a:t>
-            </a:r>
-            <a:r>
-              <a:rPr lang="ko-KR" altLang="en-US" sz="1400" dirty="0" err="1">
-                <a:ln>
-                  <a:solidFill>
-                    <a:schemeClr val="accent1">
-                      <a:alpha val="0"/>
-                    </a:schemeClr>
-                  </a:solidFill>
-                </a:ln>
-                <a:latin typeface="나눔스퀘어_ac" panose="020B0600000101010101" pitchFamily="50" charset="-127"/>
-                <a:ea typeface="나눔스퀘어_ac" panose="020B0600000101010101" pitchFamily="50" charset="-127"/>
-              </a:rPr>
-              <a:t>피피피템플릿에서는</a:t>
-            </a:r>
-            <a:r>
-              <a:rPr lang="ko-KR" altLang="en-US" sz="1400" dirty="0">
-                <a:ln>
-                  <a:solidFill>
-                    <a:schemeClr val="accent1">
-                      <a:alpha val="0"/>
-                    </a:schemeClr>
-                  </a:solidFill>
-                </a:ln>
-                <a:latin typeface="나눔스퀘어_ac" panose="020B0600000101010101" pitchFamily="50" charset="-127"/>
-                <a:ea typeface="나눔스퀘어_ac" panose="020B0600000101010101" pitchFamily="50" charset="-127"/>
-              </a:rPr>
-              <a:t> 기본적으로 </a:t>
-            </a:r>
-            <a:r>
-              <a:rPr lang="ko-KR" altLang="en-US" sz="1400" dirty="0" err="1">
-                <a:ln>
-                  <a:solidFill>
-                    <a:schemeClr val="accent1">
-                      <a:alpha val="0"/>
-                    </a:schemeClr>
-                  </a:solidFill>
-                </a:ln>
-                <a:latin typeface="나눔스퀘어_ac" panose="020B0600000101010101" pitchFamily="50" charset="-127"/>
-                <a:ea typeface="나눔스퀘어_ac" panose="020B0600000101010101" pitchFamily="50" charset="-127"/>
-              </a:rPr>
-              <a:t>꽉꽉채워주는</a:t>
-            </a:r>
-            <a:r>
-              <a:rPr lang="ko-KR" altLang="en-US" sz="1400" dirty="0">
-                <a:ln>
-                  <a:solidFill>
-                    <a:schemeClr val="accent1">
-                      <a:alpha val="0"/>
-                    </a:schemeClr>
-                  </a:solidFill>
-                </a:ln>
-                <a:latin typeface="나눔스퀘어_ac" panose="020B0600000101010101" pitchFamily="50" charset="-127"/>
-                <a:ea typeface="나눔스퀘어_ac" panose="020B0600000101010101" pitchFamily="50" charset="-127"/>
-              </a:rPr>
-              <a:t> </a:t>
-            </a:r>
-            <a:r>
-              <a:rPr lang="en-US" altLang="ko-KR" sz="1400" dirty="0">
-                <a:ln>
-                  <a:solidFill>
-                    <a:schemeClr val="accent1">
-                      <a:alpha val="0"/>
-                    </a:schemeClr>
-                  </a:solidFill>
-                </a:ln>
-                <a:latin typeface="나눔스퀘어_ac" panose="020B0600000101010101" pitchFamily="50" charset="-127"/>
-                <a:ea typeface="나눔스퀘어_ac" panose="020B0600000101010101" pitchFamily="50" charset="-127"/>
-              </a:rPr>
-              <a:t>ST</a:t>
-            </a:r>
-            <a:r>
-              <a:rPr lang="ko-KR" altLang="en-US" sz="1400" dirty="0">
-                <a:ln>
-                  <a:solidFill>
-                    <a:schemeClr val="accent1">
-                      <a:alpha val="0"/>
-                    </a:schemeClr>
-                  </a:solidFill>
-                </a:ln>
-                <a:latin typeface="나눔스퀘어_ac" panose="020B0600000101010101" pitchFamily="50" charset="-127"/>
-                <a:ea typeface="나눔스퀘어_ac" panose="020B0600000101010101" pitchFamily="50" charset="-127"/>
-              </a:rPr>
-              <a:t>로 텍스트를 조져줘야 </a:t>
-            </a:r>
-            <a:r>
-              <a:rPr lang="ko-KR" altLang="en-US" sz="1400" dirty="0" err="1">
-                <a:ln>
-                  <a:solidFill>
-                    <a:schemeClr val="accent1">
-                      <a:alpha val="0"/>
-                    </a:schemeClr>
-                  </a:solidFill>
-                </a:ln>
-                <a:latin typeface="나눔스퀘어_ac" panose="020B0600000101010101" pitchFamily="50" charset="-127"/>
-                <a:ea typeface="나눔스퀘어_ac" panose="020B0600000101010101" pitchFamily="50" charset="-127"/>
-              </a:rPr>
-              <a:t>빌드업이</a:t>
-            </a:r>
-            <a:r>
-              <a:rPr lang="ko-KR" altLang="en-US" sz="1400" dirty="0">
-                <a:ln>
-                  <a:solidFill>
-                    <a:schemeClr val="accent1">
-                      <a:alpha val="0"/>
-                    </a:schemeClr>
-                  </a:solidFill>
-                </a:ln>
-                <a:latin typeface="나눔스퀘어_ac" panose="020B0600000101010101" pitchFamily="50" charset="-127"/>
-                <a:ea typeface="나눔스퀘어_ac" panose="020B0600000101010101" pitchFamily="50" charset="-127"/>
-              </a:rPr>
-              <a:t> 가능한 부분이기 때문에 최소 </a:t>
-            </a:r>
-            <a:r>
-              <a:rPr lang="en-US" altLang="ko-KR" sz="1400" dirty="0">
-                <a:ln>
-                  <a:solidFill>
-                    <a:schemeClr val="accent1">
-                      <a:alpha val="0"/>
-                    </a:schemeClr>
-                  </a:solidFill>
-                </a:ln>
-                <a:latin typeface="나눔스퀘어_ac" panose="020B0600000101010101" pitchFamily="50" charset="-127"/>
-                <a:ea typeface="나눔스퀘어_ac" panose="020B0600000101010101" pitchFamily="50" charset="-127"/>
-              </a:rPr>
-              <a:t>2</a:t>
-            </a:r>
-            <a:r>
-              <a:rPr lang="ko-KR" altLang="en-US" sz="1400" dirty="0">
-                <a:ln>
-                  <a:solidFill>
-                    <a:schemeClr val="accent1">
-                      <a:alpha val="0"/>
-                    </a:schemeClr>
-                  </a:solidFill>
-                </a:ln>
-                <a:latin typeface="나눔스퀘어_ac" panose="020B0600000101010101" pitchFamily="50" charset="-127"/>
-                <a:ea typeface="나눔스퀘어_ac" panose="020B0600000101010101" pitchFamily="50" charset="-127"/>
-              </a:rPr>
-              <a:t>줄 반 이상을 써야 이자식이 </a:t>
-            </a:r>
-            <a:r>
-              <a:rPr lang="ko-KR" altLang="en-US" sz="1400" dirty="0" err="1">
-                <a:ln>
-                  <a:solidFill>
-                    <a:schemeClr val="accent1">
-                      <a:alpha val="0"/>
-                    </a:schemeClr>
-                  </a:solidFill>
-                </a:ln>
-                <a:latin typeface="나눔스퀘어_ac" panose="020B0600000101010101" pitchFamily="50" charset="-127"/>
-                <a:ea typeface="나눔스퀘어_ac" panose="020B0600000101010101" pitchFamily="50" charset="-127"/>
-              </a:rPr>
-              <a:t>피피티에</a:t>
-            </a:r>
-            <a:r>
-              <a:rPr lang="ko-KR" altLang="en-US" sz="1400" dirty="0">
-                <a:ln>
-                  <a:solidFill>
-                    <a:schemeClr val="accent1">
-                      <a:alpha val="0"/>
-                    </a:schemeClr>
-                  </a:solidFill>
-                </a:ln>
-                <a:latin typeface="나눔스퀘어_ac" panose="020B0600000101010101" pitchFamily="50" charset="-127"/>
-                <a:ea typeface="나눔스퀘어_ac" panose="020B0600000101010101" pitchFamily="50" charset="-127"/>
-              </a:rPr>
-              <a:t> </a:t>
-            </a:r>
-            <a:r>
-              <a:rPr lang="ko-KR" altLang="en-US" sz="1400" dirty="0" err="1">
-                <a:ln>
-                  <a:solidFill>
-                    <a:schemeClr val="accent1">
-                      <a:alpha val="0"/>
-                    </a:schemeClr>
-                  </a:solidFill>
-                </a:ln>
-                <a:latin typeface="나눔스퀘어_ac" panose="020B0600000101010101" pitchFamily="50" charset="-127"/>
-                <a:ea typeface="나눔스퀘어_ac" panose="020B0600000101010101" pitchFamily="50" charset="-127"/>
-              </a:rPr>
-              <a:t>신경좀</a:t>
-            </a:r>
-            <a:r>
-              <a:rPr lang="ko-KR" altLang="en-US" sz="1400" dirty="0">
-                <a:ln>
-                  <a:solidFill>
-                    <a:schemeClr val="accent1">
-                      <a:alpha val="0"/>
-                    </a:schemeClr>
-                  </a:solidFill>
-                </a:ln>
-                <a:latin typeface="나눔스퀘어_ac" panose="020B0600000101010101" pitchFamily="50" charset="-127"/>
-                <a:ea typeface="나눔스퀘어_ac" panose="020B0600000101010101" pitchFamily="50" charset="-127"/>
-              </a:rPr>
-              <a:t> 썼구나 라고 생각하는 </a:t>
-            </a:r>
-            <a:r>
-              <a:rPr lang="ko-KR" altLang="en-US" sz="1400">
-                <a:ln>
-                  <a:solidFill>
-                    <a:schemeClr val="accent1">
-                      <a:alpha val="0"/>
-                    </a:schemeClr>
-                  </a:solidFill>
-                </a:ln>
-                <a:latin typeface="나눔스퀘어_ac" panose="020B0600000101010101" pitchFamily="50" charset="-127"/>
-                <a:ea typeface="나눔스퀘어_ac" panose="020B0600000101010101" pitchFamily="50" charset="-127"/>
-              </a:rPr>
-              <a:t>꼰대 형님들이 </a:t>
-            </a:r>
-            <a:r>
-              <a:rPr lang="ko-KR" altLang="en-US" sz="1400" dirty="0" err="1">
-                <a:ln>
-                  <a:solidFill>
-                    <a:schemeClr val="accent1">
-                      <a:alpha val="0"/>
-                    </a:schemeClr>
-                  </a:solidFill>
-                </a:ln>
-                <a:latin typeface="나눔스퀘어_ac" panose="020B0600000101010101" pitchFamily="50" charset="-127"/>
-                <a:ea typeface="나눔스퀘어_ac" panose="020B0600000101010101" pitchFamily="50" charset="-127"/>
-              </a:rPr>
-              <a:t>있단말이지</a:t>
-            </a:r>
-            <a:r>
-              <a:rPr lang="en-US" altLang="ko-KR" sz="1400" dirty="0">
-                <a:ln>
-                  <a:solidFill>
-                    <a:schemeClr val="accent1">
-                      <a:alpha val="0"/>
-                    </a:schemeClr>
-                  </a:solidFill>
-                </a:ln>
-                <a:latin typeface="나눔스퀘어_ac" panose="020B0600000101010101" pitchFamily="50" charset="-127"/>
-                <a:ea typeface="나눔스퀘어_ac" panose="020B0600000101010101" pitchFamily="50" charset="-127"/>
-              </a:rPr>
-              <a:t>. </a:t>
-            </a:r>
-            <a:r>
-              <a:rPr lang="ko-KR" altLang="en-US" sz="1400" dirty="0">
-                <a:ln>
-                  <a:solidFill>
-                    <a:schemeClr val="accent1">
-                      <a:alpha val="0"/>
-                    </a:schemeClr>
-                  </a:solidFill>
-                </a:ln>
-                <a:latin typeface="나눔스퀘어_ac" panose="020B0600000101010101" pitchFamily="50" charset="-127"/>
-                <a:ea typeface="나눔스퀘어_ac" panose="020B0600000101010101" pitchFamily="50" charset="-127"/>
-              </a:rPr>
-              <a:t>그래서 열심히 이 템플릿으로 만드는 형님들이 글을 시작하기전에 </a:t>
-            </a:r>
-            <a:r>
-              <a:rPr lang="ko-KR" altLang="en-US" sz="1400">
-                <a:ln>
-                  <a:solidFill>
-                    <a:schemeClr val="accent1">
-                      <a:alpha val="0"/>
-                    </a:schemeClr>
-                  </a:solidFill>
-                </a:ln>
-                <a:latin typeface="나눔스퀘어_ac" panose="020B0600000101010101" pitchFamily="50" charset="-127"/>
-                <a:ea typeface="나눔스퀘어_ac" panose="020B0600000101010101" pitchFamily="50" charset="-127"/>
-              </a:rPr>
-              <a:t>형님들의 꼰상사들을 </a:t>
-            </a:r>
-            <a:r>
-              <a:rPr lang="ko-KR" altLang="en-US" sz="1400" dirty="0">
-                <a:ln>
-                  <a:solidFill>
-                    <a:schemeClr val="accent1">
-                      <a:alpha val="0"/>
-                    </a:schemeClr>
-                  </a:solidFill>
-                </a:ln>
-                <a:latin typeface="나눔스퀘어_ac" panose="020B0600000101010101" pitchFamily="50" charset="-127"/>
-                <a:ea typeface="나눔스퀘어_ac" panose="020B0600000101010101" pitchFamily="50" charset="-127"/>
-              </a:rPr>
-              <a:t>내가 대신 욕하는 </a:t>
-            </a:r>
-            <a:r>
-              <a:rPr lang="en-US" altLang="ko-KR" sz="1400" dirty="0">
-                <a:ln>
-                  <a:solidFill>
-                    <a:schemeClr val="accent1">
-                      <a:alpha val="0"/>
-                    </a:schemeClr>
-                  </a:solidFill>
-                </a:ln>
-                <a:latin typeface="나눔스퀘어_ac" panose="020B0600000101010101" pitchFamily="50" charset="-127"/>
-                <a:ea typeface="나눔스퀘어_ac" panose="020B0600000101010101" pitchFamily="50" charset="-127"/>
-              </a:rPr>
-              <a:t>ST</a:t>
-            </a:r>
-            <a:r>
-              <a:rPr lang="ko-KR" altLang="en-US" sz="1400">
-                <a:ln>
-                  <a:solidFill>
-                    <a:schemeClr val="accent1">
-                      <a:alpha val="0"/>
-                    </a:schemeClr>
-                  </a:solidFill>
-                </a:ln>
-                <a:latin typeface="나눔스퀘어_ac" panose="020B0600000101010101" pitchFamily="50" charset="-127"/>
-                <a:ea typeface="나눔스퀘어_ac" panose="020B0600000101010101" pitchFamily="50" charset="-127"/>
-              </a:rPr>
-              <a:t>로 글을 쓰다보니 어느덧 </a:t>
-            </a:r>
-            <a:r>
-              <a:rPr lang="en-US" altLang="ko-KR" sz="1400">
-                <a:ln>
-                  <a:solidFill>
-                    <a:schemeClr val="accent1">
-                      <a:alpha val="0"/>
-                    </a:schemeClr>
-                  </a:solidFill>
-                </a:ln>
-                <a:latin typeface="나눔스퀘어_ac" panose="020B0600000101010101" pitchFamily="50" charset="-127"/>
-                <a:ea typeface="나눔스퀘어_ac" panose="020B0600000101010101" pitchFamily="50" charset="-127"/>
-              </a:rPr>
-              <a:t>3</a:t>
-            </a:r>
-            <a:r>
-              <a:rPr lang="ko-KR" altLang="en-US" sz="1400">
-                <a:ln>
-                  <a:solidFill>
-                    <a:schemeClr val="accent1">
-                      <a:alpha val="0"/>
-                    </a:schemeClr>
-                  </a:solidFill>
-                </a:ln>
-                <a:latin typeface="나눔스퀘어_ac" panose="020B0600000101010101" pitchFamily="50" charset="-127"/>
-                <a:ea typeface="나눔스퀘어_ac" panose="020B0600000101010101" pitchFamily="50" charset="-127"/>
-              </a:rPr>
-              <a:t>줄바리 이상을 나이스하게 썼단말이지 </a:t>
-            </a:r>
-            <a:r>
-              <a:rPr lang="en-US" altLang="ko-KR" sz="1400">
-                <a:ln>
-                  <a:solidFill>
-                    <a:schemeClr val="accent1">
-                      <a:alpha val="0"/>
-                    </a:schemeClr>
-                  </a:solidFill>
-                </a:ln>
-                <a:latin typeface="나눔스퀘어_ac" panose="020B0600000101010101" pitchFamily="50" charset="-127"/>
-                <a:ea typeface="나눔스퀘어_ac" panose="020B0600000101010101" pitchFamily="50" charset="-127"/>
-              </a:rPr>
-              <a:t>3</a:t>
-            </a:r>
-            <a:r>
-              <a:rPr lang="ko-KR" altLang="en-US" sz="1400">
-                <a:ln>
-                  <a:solidFill>
-                    <a:schemeClr val="accent1">
-                      <a:alpha val="0"/>
-                    </a:schemeClr>
-                  </a:solidFill>
-                </a:ln>
-                <a:latin typeface="나눔스퀘어_ac" panose="020B0600000101010101" pitchFamily="50" charset="-127"/>
-                <a:ea typeface="나눔스퀘어_ac" panose="020B0600000101010101" pitchFamily="50" charset="-127"/>
-              </a:rPr>
-              <a:t>줄 끝까지 채워주고 </a:t>
-            </a:r>
-            <a:r>
-              <a:rPr lang="en-US" altLang="ko-KR" sz="1400">
-                <a:ln>
-                  <a:solidFill>
-                    <a:schemeClr val="accent1">
-                      <a:alpha val="0"/>
-                    </a:schemeClr>
-                  </a:solidFill>
-                </a:ln>
-                <a:latin typeface="나눔스퀘어_ac" panose="020B0600000101010101" pitchFamily="50" charset="-127"/>
-                <a:ea typeface="나눔스퀘어_ac" panose="020B0600000101010101" pitchFamily="50" charset="-127"/>
-              </a:rPr>
-              <a:t>4</a:t>
-            </a:r>
-            <a:r>
-              <a:rPr lang="ko-KR" altLang="en-US" sz="1400">
-                <a:ln>
-                  <a:solidFill>
-                    <a:schemeClr val="accent1">
-                      <a:alpha val="0"/>
-                    </a:schemeClr>
-                  </a:solidFill>
-                </a:ln>
-                <a:latin typeface="나눔스퀘어_ac" panose="020B0600000101010101" pitchFamily="50" charset="-127"/>
-                <a:ea typeface="나눔스퀘어_ac" panose="020B0600000101010101" pitchFamily="50" charset="-127"/>
-              </a:rPr>
-              <a:t>줄 초반에 끝내주는 르낌 </a:t>
-            </a:r>
-            <a:r>
-              <a:rPr lang="en-US" altLang="ko-KR" sz="1400">
-                <a:ln>
-                  <a:solidFill>
-                    <a:schemeClr val="accent1">
-                      <a:alpha val="0"/>
-                    </a:schemeClr>
-                  </a:solidFill>
-                </a:ln>
-                <a:latin typeface="나눔스퀘어_ac" panose="020B0600000101010101" pitchFamily="50" charset="-127"/>
-                <a:ea typeface="나눔스퀘어_ac" panose="020B0600000101010101" pitchFamily="50" charset="-127"/>
-              </a:rPr>
-              <a:t>RG?</a:t>
-            </a:r>
-            <a:endParaRPr lang="ko-KR" altLang="en-US" sz="1400" dirty="0">
-              <a:ln>
-                <a:solidFill>
-                  <a:schemeClr val="accent1">
-                    <a:alpha val="0"/>
-                  </a:schemeClr>
-                </a:solidFill>
-              </a:ln>
-              <a:latin typeface="나눔스퀘어_ac" panose="020B0600000101010101" pitchFamily="50" charset="-127"/>
-              <a:ea typeface="나눔스퀘어_ac" panose="020B0600000101010101" pitchFamily="50" charset="-127"/>
-            </a:endParaRPr>
-          </a:p>
-        </p:txBody>
-      </p:sp>
-      <p:sp>
-        <p:nvSpPr>
-          <p:cNvPr id="21" name="화살표: 갈매기형 수장 20">
-            <a:extLst>
-              <a:ext uri="{FF2B5EF4-FFF2-40B4-BE49-F238E27FC236}">
-                <a16:creationId xmlns:a16="http://schemas.microsoft.com/office/drawing/2014/main" id="{D4741250-E862-7A83-2DD3-1644D66C1157}"/>
-              </a:ext>
-            </a:extLst>
-          </p:cNvPr>
-          <p:cNvSpPr/>
-          <p:nvPr/>
-        </p:nvSpPr>
-        <p:spPr>
-          <a:xfrm>
-            <a:off x="768350" y="1826770"/>
-            <a:ext cx="91281" cy="107156"/>
-          </a:xfrm>
-          <a:prstGeom prst="chevron">
-            <a:avLst/>
-          </a:prstGeom>
-          <a:solidFill>
-            <a:srgbClr val="09E8FF"/>
-          </a:solidFill>
-          <a:ln>
-            <a:noFill/>
-          </a:ln>
-        </p:spPr>
-        <p:style>
-          <a:lnRef idx="2">
-            <a:schemeClr val="accent1">
-              <a:shade val="50000"/>
-            </a:schemeClr>
-          </a:lnRef>
-          <a:fillRef idx="1">
-            <a:schemeClr val="accent1"/>
-          </a:fillRef>
-          <a:effectRef idx="0">
-            <a:schemeClr val="accent1"/>
-          </a:effectRef>
-          <a:fontRef idx="minor">
-            <a:schemeClr val="lt1"/>
-          </a:fontRef>
-        </p:style>
-        <p:txBody>
-          <a:bodyPr rtlCol="0" anchor="ctr"/>
-          <a:lstStyle/>
-          <a:p>
-            <a:pPr algn="ctr"/>
-            <a:endParaRPr lang="ko-KR" altLang="en-US" dirty="0">
-              <a:ln>
-                <a:solidFill>
-                  <a:schemeClr val="accent1">
-                    <a:alpha val="0"/>
-                  </a:schemeClr>
-                </a:solidFill>
-              </a:ln>
-              <a:solidFill>
-                <a:schemeClr val="tx1"/>
-              </a:solidFill>
-            </a:endParaRPr>
-          </a:p>
-        </p:txBody>
-      </p:sp>
-      <p:sp>
-        <p:nvSpPr>
-          <p:cNvPr id="23" name="화살표: 갈매기형 수장 22">
-            <a:extLst>
-              <a:ext uri="{FF2B5EF4-FFF2-40B4-BE49-F238E27FC236}">
-                <a16:creationId xmlns:a16="http://schemas.microsoft.com/office/drawing/2014/main" id="{04F46AE6-8B17-9CA8-A52D-0F69C99BE6EB}"/>
-              </a:ext>
-            </a:extLst>
-          </p:cNvPr>
-          <p:cNvSpPr/>
-          <p:nvPr/>
-        </p:nvSpPr>
-        <p:spPr>
-          <a:xfrm>
-            <a:off x="704056" y="1826770"/>
-            <a:ext cx="91281" cy="107156"/>
-          </a:xfrm>
-          <a:prstGeom prst="chevron">
-            <a:avLst/>
-          </a:prstGeom>
-          <a:solidFill>
-            <a:srgbClr val="0E2C3F"/>
-          </a:solidFill>
-          <a:ln>
-            <a:noFill/>
-          </a:ln>
-        </p:spPr>
-        <p:style>
-          <a:lnRef idx="2">
-            <a:schemeClr val="accent1">
-              <a:shade val="50000"/>
-            </a:schemeClr>
-          </a:lnRef>
-          <a:fillRef idx="1">
-            <a:schemeClr val="accent1"/>
-          </a:fillRef>
-          <a:effectRef idx="0">
-            <a:schemeClr val="accent1"/>
-          </a:effectRef>
-          <a:fontRef idx="minor">
-            <a:schemeClr val="lt1"/>
-          </a:fontRef>
-        </p:style>
-        <p:txBody>
-          <a:bodyPr rtlCol="0" anchor="ctr"/>
-          <a:lstStyle/>
-          <a:p>
-            <a:pPr algn="ctr"/>
-            <a:endParaRPr lang="ko-KR" altLang="en-US">
-              <a:ln>
-                <a:solidFill>
-                  <a:schemeClr val="accent1">
-                    <a:alpha val="0"/>
-                  </a:schemeClr>
-                </a:solidFill>
-              </a:ln>
-              <a:solidFill>
-                <a:schemeClr val="tx1"/>
-              </a:solidFill>
-            </a:endParaRPr>
-          </a:p>
-        </p:txBody>
-      </p:sp>
-    </p:spTree>
-    <p:extLst>
-      <p:ext uri="{BB962C8B-B14F-4D97-AF65-F5344CB8AC3E}">
-        <p14:creationId xmlns:p14="http://schemas.microsoft.com/office/powerpoint/2010/main" val="2266829799"/>
       </p:ext>
     </p:extLst>
   </p:cSld>
